--- a/00 PRESENTACIONES compartida alumnos/ED05 - UML Diagramas de clases.pptx
+++ b/00 PRESENTACIONES compartida alumnos/ED05 - UML Diagramas de clases.pptx
@@ -182,9 +182,6 @@
             <p14:sldId id="369"/>
           </p14:sldIdLst>
         </p14:section>
-        <p14:section name="EJEMPLOS" id="{9A199C11-561C-4676-B381-AAEFF7260775}">
-          <p14:sldIdLst/>
-        </p14:section>
         <p14:section name="RECURSOS" id="{5A9A2E12-7646-41F5-A12A-BD84E5FDFE69}">
           <p14:sldIdLst>
             <p14:sldId id="302"/>
@@ -229,7 +226,7 @@
 <file path=ppt/revisionInfo.xml><?xml version="1.0" encoding="utf-8"?>
 <p1510:revInfo xmlns:a="http://schemas.openxmlformats.org/drawingml/2006/main" xmlns:r="http://schemas.openxmlformats.org/officeDocument/2006/relationships" xmlns:p1510="http://schemas.microsoft.com/office/powerpoint/2015/10/main">
   <p1510:revLst>
-    <p1510:client id="{89D32F01-F4EF-46F7-9100-DAE74FAD5D28}" v="15" dt="2025-07-08T16:50:21.422"/>
+    <p1510:client id="{C32461E6-2C25-869D-4C9A-1017D71EFFF2}" v="42" dt="2026-02-15T11:49:53.620"/>
   </p1510:revLst>
 </p1510:revInfo>
 </file>
@@ -237,1294 +234,81 @@
 <file path=ppt/changesInfos/changesInfo1.xml><?xml version="1.0" encoding="utf-8"?>
 <pc:chgInfo xmlns:a="http://schemas.openxmlformats.org/drawingml/2006/main" xmlns:r="http://schemas.openxmlformats.org/officeDocument/2006/relationships" xmlns:ac="http://schemas.microsoft.com/office/drawing/2013/main/command" xmlns:pc="http://schemas.microsoft.com/office/powerpoint/2013/main/command">
   <pc:docChgLst>
-    <pc:chgData name="MIGUEL TRIGUEROS MUÑOZ" userId="S::miguel.trigueros@aulaxxi.murciaeduca.es::a4ee0321-97d7-430f-98a8-7ed13ff9a4bf" providerId="AD" clId="Web-{D2D9E662-8432-1649-C4D0-BA91653A1955}"/>
+    <pc:chgData name="MIGUEL TRIGUEROS MUÑOZ" userId="S::miguel.trigueros@aulaxxi.murciaeduca.es::a4ee0321-97d7-430f-98a8-7ed13ff9a4bf" providerId="AD" clId="Web-{C32461E6-2C25-869D-4C9A-1017D71EFFF2}"/>
     <pc:docChg chg="modSld">
-      <pc:chgData name="MIGUEL TRIGUEROS MUÑOZ" userId="S::miguel.trigueros@aulaxxi.murciaeduca.es::a4ee0321-97d7-430f-98a8-7ed13ff9a4bf" providerId="AD" clId="Web-{D2D9E662-8432-1649-C4D0-BA91653A1955}" dt="2025-02-18T07:36:21.699" v="14"/>
+      <pc:chgData name="MIGUEL TRIGUEROS MUÑOZ" userId="S::miguel.trigueros@aulaxxi.murciaeduca.es::a4ee0321-97d7-430f-98a8-7ed13ff9a4bf" providerId="AD" clId="Web-{C32461E6-2C25-869D-4C9A-1017D71EFFF2}" dt="2026-02-15T11:49:53.620" v="146" actId="20577"/>
       <pc:docMkLst>
         <pc:docMk/>
       </pc:docMkLst>
-      <pc:sldChg chg="addSp modSp">
-        <pc:chgData name="MIGUEL TRIGUEROS MUÑOZ" userId="S::miguel.trigueros@aulaxxi.murciaeduca.es::a4ee0321-97d7-430f-98a8-7ed13ff9a4bf" providerId="AD" clId="Web-{D2D9E662-8432-1649-C4D0-BA91653A1955}" dt="2025-02-18T07:36:21.699" v="14"/>
-        <pc:sldMkLst>
-          <pc:docMk/>
-          <pc:sldMk cId="2044085444" sldId="327"/>
-        </pc:sldMkLst>
-      </pc:sldChg>
-    </pc:docChg>
-  </pc:docChgLst>
-  <pc:docChgLst>
-    <pc:chgData name="MIGUEL TRIGUEROS MUÑOZ" userId="a4ee0321-97d7-430f-98a8-7ed13ff9a4bf" providerId="ADAL" clId="{6F89BEEB-4604-4287-9743-513654D87D88}"/>
-    <pc:docChg chg="undo custSel addSld delSld modSld modSection">
-      <pc:chgData name="MIGUEL TRIGUEROS MUÑOZ" userId="a4ee0321-97d7-430f-98a8-7ed13ff9a4bf" providerId="ADAL" clId="{6F89BEEB-4604-4287-9743-513654D87D88}" dt="2024-05-18T07:23:02.373" v="64" actId="1076"/>
-      <pc:docMkLst>
-        <pc:docMk/>
-      </pc:docMkLst>
-      <pc:sldChg chg="modSp mod">
-        <pc:chgData name="MIGUEL TRIGUEROS MUÑOZ" userId="a4ee0321-97d7-430f-98a8-7ed13ff9a4bf" providerId="ADAL" clId="{6F89BEEB-4604-4287-9743-513654D87D88}" dt="2024-05-18T06:14:14.735" v="4" actId="13926"/>
-        <pc:sldMkLst>
-          <pc:docMk/>
-          <pc:sldMk cId="1059083778" sldId="319"/>
-        </pc:sldMkLst>
-      </pc:sldChg>
-      <pc:sldChg chg="modSp mod">
-        <pc:chgData name="MIGUEL TRIGUEROS MUÑOZ" userId="a4ee0321-97d7-430f-98a8-7ed13ff9a4bf" providerId="ADAL" clId="{6F89BEEB-4604-4287-9743-513654D87D88}" dt="2024-05-18T06:14:41.999" v="12" actId="13926"/>
-        <pc:sldMkLst>
-          <pc:docMk/>
-          <pc:sldMk cId="3948044143" sldId="320"/>
-        </pc:sldMkLst>
-      </pc:sldChg>
-      <pc:sldChg chg="modSp mod">
-        <pc:chgData name="MIGUEL TRIGUEROS MUÑOZ" userId="a4ee0321-97d7-430f-98a8-7ed13ff9a4bf" providerId="ADAL" clId="{6F89BEEB-4604-4287-9743-513654D87D88}" dt="2024-05-18T06:18:35.041" v="17" actId="14100"/>
-        <pc:sldMkLst>
-          <pc:docMk/>
-          <pc:sldMk cId="3317774778" sldId="325"/>
-        </pc:sldMkLst>
-      </pc:sldChg>
-      <pc:sldChg chg="modSp mod">
-        <pc:chgData name="MIGUEL TRIGUEROS MUÑOZ" userId="a4ee0321-97d7-430f-98a8-7ed13ff9a4bf" providerId="ADAL" clId="{6F89BEEB-4604-4287-9743-513654D87D88}" dt="2024-05-18T06:19:14.512" v="18" actId="207"/>
-        <pc:sldMkLst>
-          <pc:docMk/>
-          <pc:sldMk cId="2044085444" sldId="327"/>
-        </pc:sldMkLst>
-      </pc:sldChg>
-      <pc:sldChg chg="modSp mod">
-        <pc:chgData name="MIGUEL TRIGUEROS MUÑOZ" userId="a4ee0321-97d7-430f-98a8-7ed13ff9a4bf" providerId="ADAL" clId="{6F89BEEB-4604-4287-9743-513654D87D88}" dt="2024-05-18T06:15:20.882" v="15" actId="207"/>
-        <pc:sldMkLst>
-          <pc:docMk/>
-          <pc:sldMk cId="3660112489" sldId="357"/>
-        </pc:sldMkLst>
-      </pc:sldChg>
-      <pc:sldChg chg="modSp mod">
-        <pc:chgData name="MIGUEL TRIGUEROS MUÑOZ" userId="a4ee0321-97d7-430f-98a8-7ed13ff9a4bf" providerId="ADAL" clId="{6F89BEEB-4604-4287-9743-513654D87D88}" dt="2024-05-18T06:13:23.811" v="2" actId="207"/>
-        <pc:sldMkLst>
-          <pc:docMk/>
-          <pc:sldMk cId="3427303393" sldId="358"/>
-        </pc:sldMkLst>
-      </pc:sldChg>
-      <pc:sldChg chg="modSp mod">
-        <pc:chgData name="MIGUEL TRIGUEROS MUÑOZ" userId="a4ee0321-97d7-430f-98a8-7ed13ff9a4bf" providerId="ADAL" clId="{6F89BEEB-4604-4287-9743-513654D87D88}" dt="2024-05-18T07:23:02.373" v="64" actId="1076"/>
-        <pc:sldMkLst>
-          <pc:docMk/>
-          <pc:sldMk cId="557761139" sldId="362"/>
-        </pc:sldMkLst>
-      </pc:sldChg>
-      <pc:sldChg chg="modSp mod">
-        <pc:chgData name="MIGUEL TRIGUEROS MUÑOZ" userId="a4ee0321-97d7-430f-98a8-7ed13ff9a4bf" providerId="ADAL" clId="{6F89BEEB-4604-4287-9743-513654D87D88}" dt="2024-05-18T06:24:43.874" v="39" actId="20577"/>
-        <pc:sldMkLst>
-          <pc:docMk/>
-          <pc:sldMk cId="3422367261" sldId="365"/>
-        </pc:sldMkLst>
-      </pc:sldChg>
-      <pc:sldChg chg="addSp delSp modSp add del mod">
-        <pc:chgData name="MIGUEL TRIGUEROS MUÑOZ" userId="a4ee0321-97d7-430f-98a8-7ed13ff9a4bf" providerId="ADAL" clId="{6F89BEEB-4604-4287-9743-513654D87D88}" dt="2024-05-18T06:46:04.020" v="63" actId="47"/>
-        <pc:sldMkLst>
-          <pc:docMk/>
-          <pc:sldMk cId="1143496369" sldId="370"/>
-        </pc:sldMkLst>
-      </pc:sldChg>
-    </pc:docChg>
-  </pc:docChgLst>
-  <pc:docChgLst>
-    <pc:chgData name="MIGUEL TRIGUEROS MUÑOZ" userId="a4ee0321-97d7-430f-98a8-7ed13ff9a4bf" providerId="ADAL" clId="{5B3B6A0D-D067-4D34-8631-91ABF30A2C5B}"/>
-    <pc:docChg chg="undo redo custSel addSld delSld modSld sldOrd modSection">
-      <pc:chgData name="MIGUEL TRIGUEROS MUÑOZ" userId="a4ee0321-97d7-430f-98a8-7ed13ff9a4bf" providerId="ADAL" clId="{5B3B6A0D-D067-4D34-8631-91ABF30A2C5B}" dt="2024-03-10T08:21:10.022" v="5251"/>
-      <pc:docMkLst>
-        <pc:docMk/>
-      </pc:docMkLst>
-      <pc:sldChg chg="modSp mod">
-        <pc:chgData name="MIGUEL TRIGUEROS MUÑOZ" userId="a4ee0321-97d7-430f-98a8-7ed13ff9a4bf" providerId="ADAL" clId="{5B3B6A0D-D067-4D34-8631-91ABF30A2C5B}" dt="2024-02-24T08:17:48.623" v="1591" actId="1076"/>
-        <pc:sldMkLst>
-          <pc:docMk/>
-          <pc:sldMk cId="2154345873" sldId="317"/>
-        </pc:sldMkLst>
-      </pc:sldChg>
-      <pc:sldChg chg="addSp delSp mod">
-        <pc:chgData name="MIGUEL TRIGUEROS MUÑOZ" userId="a4ee0321-97d7-430f-98a8-7ed13ff9a4bf" providerId="ADAL" clId="{5B3B6A0D-D067-4D34-8631-91ABF30A2C5B}" dt="2024-03-03T10:29:14.906" v="4512" actId="478"/>
-        <pc:sldMkLst>
-          <pc:docMk/>
-          <pc:sldMk cId="675174442" sldId="322"/>
-        </pc:sldMkLst>
-      </pc:sldChg>
-      <pc:sldChg chg="addSp modSp mod modAnim modNotesTx">
-        <pc:chgData name="MIGUEL TRIGUEROS MUÑOZ" userId="a4ee0321-97d7-430f-98a8-7ed13ff9a4bf" providerId="ADAL" clId="{5B3B6A0D-D067-4D34-8631-91ABF30A2C5B}" dt="2024-02-26T08:58:03.651" v="2324" actId="20577"/>
-        <pc:sldMkLst>
-          <pc:docMk/>
-          <pc:sldMk cId="4268188109" sldId="323"/>
-        </pc:sldMkLst>
-      </pc:sldChg>
-      <pc:sldChg chg="addSp modSp mod">
-        <pc:chgData name="MIGUEL TRIGUEROS MUÑOZ" userId="a4ee0321-97d7-430f-98a8-7ed13ff9a4bf" providerId="ADAL" clId="{5B3B6A0D-D067-4D34-8631-91ABF30A2C5B}" dt="2024-02-25T11:24:55.484" v="2100" actId="1076"/>
-        <pc:sldMkLst>
-          <pc:docMk/>
-          <pc:sldMk cId="4205591290" sldId="324"/>
-        </pc:sldMkLst>
-      </pc:sldChg>
-      <pc:sldChg chg="modSp">
-        <pc:chgData name="MIGUEL TRIGUEROS MUÑOZ" userId="a4ee0321-97d7-430f-98a8-7ed13ff9a4bf" providerId="ADAL" clId="{5B3B6A0D-D067-4D34-8631-91ABF30A2C5B}" dt="2024-02-25T11:21:01.043" v="2088" actId="13926"/>
-        <pc:sldMkLst>
-          <pc:docMk/>
-          <pc:sldMk cId="3317774778" sldId="325"/>
-        </pc:sldMkLst>
-      </pc:sldChg>
-      <pc:sldChg chg="addSp modSp mod modAnim modNotesTx">
-        <pc:chgData name="MIGUEL TRIGUEROS MUÑOZ" userId="a4ee0321-97d7-430f-98a8-7ed13ff9a4bf" providerId="ADAL" clId="{5B3B6A0D-D067-4D34-8631-91ABF30A2C5B}" dt="2024-03-06T12:48:47.893" v="5249" actId="114"/>
-        <pc:sldMkLst>
-          <pc:docMk/>
-          <pc:sldMk cId="2044085444" sldId="327"/>
-        </pc:sldMkLst>
-      </pc:sldChg>
-      <pc:sldChg chg="addSp delSp modSp mod">
-        <pc:chgData name="MIGUEL TRIGUEROS MUÑOZ" userId="a4ee0321-97d7-430f-98a8-7ed13ff9a4bf" providerId="ADAL" clId="{5B3B6A0D-D067-4D34-8631-91ABF30A2C5B}" dt="2024-03-04T08:44:09.684" v="4646" actId="255"/>
-        <pc:sldMkLst>
-          <pc:docMk/>
-          <pc:sldMk cId="155112023" sldId="328"/>
-        </pc:sldMkLst>
-      </pc:sldChg>
-      <pc:sldChg chg="addSp modSp mod">
-        <pc:chgData name="MIGUEL TRIGUEROS MUÑOZ" userId="a4ee0321-97d7-430f-98a8-7ed13ff9a4bf" providerId="ADAL" clId="{5B3B6A0D-D067-4D34-8631-91ABF30A2C5B}" dt="2024-02-29T08:17:33.773" v="2676" actId="1076"/>
-        <pc:sldMkLst>
-          <pc:docMk/>
-          <pc:sldMk cId="1498135890" sldId="329"/>
-        </pc:sldMkLst>
-      </pc:sldChg>
-      <pc:sldChg chg="addSp modSp mod">
-        <pc:chgData name="MIGUEL TRIGUEROS MUÑOZ" userId="a4ee0321-97d7-430f-98a8-7ed13ff9a4bf" providerId="ADAL" clId="{5B3B6A0D-D067-4D34-8631-91ABF30A2C5B}" dt="2024-02-29T08:18:34.383" v="2679" actId="1076"/>
-        <pc:sldMkLst>
-          <pc:docMk/>
-          <pc:sldMk cId="385184565" sldId="330"/>
-        </pc:sldMkLst>
-      </pc:sldChg>
-      <pc:sldChg chg="addSp modSp mod">
-        <pc:chgData name="MIGUEL TRIGUEROS MUÑOZ" userId="a4ee0321-97d7-430f-98a8-7ed13ff9a4bf" providerId="ADAL" clId="{5B3B6A0D-D067-4D34-8631-91ABF30A2C5B}" dt="2024-02-29T08:18:54.828" v="2682" actId="1076"/>
-        <pc:sldMkLst>
-          <pc:docMk/>
-          <pc:sldMk cId="3659872342" sldId="332"/>
-        </pc:sldMkLst>
-      </pc:sldChg>
-      <pc:sldChg chg="modSp mod addCm">
-        <pc:chgData name="MIGUEL TRIGUEROS MUÑOZ" userId="a4ee0321-97d7-430f-98a8-7ed13ff9a4bf" providerId="ADAL" clId="{5B3B6A0D-D067-4D34-8631-91ABF30A2C5B}" dt="2024-03-10T08:21:10.022" v="5251"/>
-        <pc:sldMkLst>
-          <pc:docMk/>
-          <pc:sldMk cId="952270227" sldId="333"/>
-        </pc:sldMkLst>
-        <pc:extLst>
-          <p:ext xmlns:p="http://schemas.openxmlformats.org/presentationml/2006/main" uri="{D6D511B9-2390-475A-947B-AFAB55BFBCF1}">
-            <pc226:cmChg xmlns:pc226="http://schemas.microsoft.com/office/powerpoint/2022/06/main/command" chg="add">
-              <pc226:chgData name="MIGUEL TRIGUEROS MUÑOZ" userId="a4ee0321-97d7-430f-98a8-7ed13ff9a4bf" providerId="ADAL" clId="{5B3B6A0D-D067-4D34-8631-91ABF30A2C5B}" dt="2024-03-10T08:21:10.022" v="5251"/>
-              <pc2:cmMkLst xmlns:pc2="http://schemas.microsoft.com/office/powerpoint/2019/9/main/command">
-                <pc:docMk/>
-                <pc:sldMk cId="952270227" sldId="333"/>
-                <pc2:cmMk id="{3136CD74-42C5-4D17-ACF1-463C6CA295D3}"/>
-              </pc2:cmMkLst>
-            </pc226:cmChg>
-          </p:ext>
-        </pc:extLst>
-      </pc:sldChg>
-      <pc:sldChg chg="modSp del mod">
-        <pc:chgData name="MIGUEL TRIGUEROS MUÑOZ" userId="a4ee0321-97d7-430f-98a8-7ed13ff9a4bf" providerId="ADAL" clId="{5B3B6A0D-D067-4D34-8631-91ABF30A2C5B}" dt="2024-03-10T06:05:28.552" v="5250" actId="47"/>
-        <pc:sldMkLst>
-          <pc:docMk/>
-          <pc:sldMk cId="3289902073" sldId="334"/>
-        </pc:sldMkLst>
-      </pc:sldChg>
-      <pc:sldChg chg="addSp delSp modSp del mod">
-        <pc:chgData name="MIGUEL TRIGUEROS MUÑOZ" userId="a4ee0321-97d7-430f-98a8-7ed13ff9a4bf" providerId="ADAL" clId="{5B3B6A0D-D067-4D34-8631-91ABF30A2C5B}" dt="2024-03-10T06:05:28.552" v="5250" actId="47"/>
-        <pc:sldMkLst>
-          <pc:docMk/>
-          <pc:sldMk cId="2360361628" sldId="335"/>
-        </pc:sldMkLst>
-      </pc:sldChg>
-      <pc:sldChg chg="modSp del mod">
-        <pc:chgData name="MIGUEL TRIGUEROS MUÑOZ" userId="a4ee0321-97d7-430f-98a8-7ed13ff9a4bf" providerId="ADAL" clId="{5B3B6A0D-D067-4D34-8631-91ABF30A2C5B}" dt="2024-03-10T06:05:28.552" v="5250" actId="47"/>
-        <pc:sldMkLst>
-          <pc:docMk/>
-          <pc:sldMk cId="270283012" sldId="336"/>
-        </pc:sldMkLst>
-      </pc:sldChg>
-      <pc:sldChg chg="addSp delSp modSp del mod setBg addAnim delAnim">
-        <pc:chgData name="MIGUEL TRIGUEROS MUÑOZ" userId="a4ee0321-97d7-430f-98a8-7ed13ff9a4bf" providerId="ADAL" clId="{5B3B6A0D-D067-4D34-8631-91ABF30A2C5B}" dt="2024-03-10T06:05:28.552" v="5250" actId="47"/>
-        <pc:sldMkLst>
-          <pc:docMk/>
-          <pc:sldMk cId="3066266296" sldId="337"/>
-        </pc:sldMkLst>
-      </pc:sldChg>
-      <pc:sldChg chg="addSp delSp modSp del mod">
-        <pc:chgData name="MIGUEL TRIGUEROS MUÑOZ" userId="a4ee0321-97d7-430f-98a8-7ed13ff9a4bf" providerId="ADAL" clId="{5B3B6A0D-D067-4D34-8631-91ABF30A2C5B}" dt="2024-03-10T06:05:28.552" v="5250" actId="47"/>
-        <pc:sldMkLst>
-          <pc:docMk/>
-          <pc:sldMk cId="2443124605" sldId="338"/>
-        </pc:sldMkLst>
-      </pc:sldChg>
-      <pc:sldChg chg="addSp delSp modSp del mod modNotesTx">
-        <pc:chgData name="MIGUEL TRIGUEROS MUÑOZ" userId="a4ee0321-97d7-430f-98a8-7ed13ff9a4bf" providerId="ADAL" clId="{5B3B6A0D-D067-4D34-8631-91ABF30A2C5B}" dt="2024-03-10T06:05:28.552" v="5250" actId="47"/>
-        <pc:sldMkLst>
-          <pc:docMk/>
-          <pc:sldMk cId="2088097569" sldId="339"/>
-        </pc:sldMkLst>
-      </pc:sldChg>
-      <pc:sldChg chg="addSp delSp modSp mod">
-        <pc:chgData name="MIGUEL TRIGUEROS MUÑOZ" userId="a4ee0321-97d7-430f-98a8-7ed13ff9a4bf" providerId="ADAL" clId="{5B3B6A0D-D067-4D34-8631-91ABF30A2C5B}" dt="2024-02-29T07:48:17.428" v="2601" actId="2085"/>
-        <pc:sldMkLst>
-          <pc:docMk/>
-          <pc:sldMk cId="2896794478" sldId="348"/>
-        </pc:sldMkLst>
-      </pc:sldChg>
-      <pc:sldChg chg="modSp mod">
-        <pc:chgData name="MIGUEL TRIGUEROS MUÑOZ" userId="a4ee0321-97d7-430f-98a8-7ed13ff9a4bf" providerId="ADAL" clId="{5B3B6A0D-D067-4D34-8631-91ABF30A2C5B}" dt="2024-02-19T10:04:57.768" v="413" actId="20577"/>
-        <pc:sldMkLst>
-          <pc:docMk/>
-          <pc:sldMk cId="3660112489" sldId="357"/>
-        </pc:sldMkLst>
-      </pc:sldChg>
-      <pc:sldChg chg="addSp delSp modSp mod modNotesTx">
-        <pc:chgData name="MIGUEL TRIGUEROS MUÑOZ" userId="a4ee0321-97d7-430f-98a8-7ed13ff9a4bf" providerId="ADAL" clId="{5B3B6A0D-D067-4D34-8631-91ABF30A2C5B}" dt="2024-02-24T06:31:34.440" v="528" actId="20577"/>
-        <pc:sldMkLst>
-          <pc:docMk/>
-          <pc:sldMk cId="3427303393" sldId="358"/>
-        </pc:sldMkLst>
-      </pc:sldChg>
-      <pc:sldChg chg="addSp delSp modSp mod ord">
-        <pc:chgData name="MIGUEL TRIGUEROS MUÑOZ" userId="a4ee0321-97d7-430f-98a8-7ed13ff9a4bf" providerId="ADAL" clId="{5B3B6A0D-D067-4D34-8631-91ABF30A2C5B}" dt="2024-02-25T11:23:36.732" v="2098" actId="1076"/>
-        <pc:sldMkLst>
-          <pc:docMk/>
-          <pc:sldMk cId="2538212918" sldId="359"/>
-        </pc:sldMkLst>
-      </pc:sldChg>
-      <pc:sldChg chg="addSp delSp modSp mod">
-        <pc:chgData name="MIGUEL TRIGUEROS MUÑOZ" userId="a4ee0321-97d7-430f-98a8-7ed13ff9a4bf" providerId="ADAL" clId="{5B3B6A0D-D067-4D34-8631-91ABF30A2C5B}" dt="2024-02-29T08:32:06.036" v="2878" actId="14100"/>
-        <pc:sldMkLst>
-          <pc:docMk/>
-          <pc:sldMk cId="557761139" sldId="362"/>
-        </pc:sldMkLst>
-      </pc:sldChg>
-      <pc:sldChg chg="modSp mod">
-        <pc:chgData name="MIGUEL TRIGUEROS MUÑOZ" userId="a4ee0321-97d7-430f-98a8-7ed13ff9a4bf" providerId="ADAL" clId="{5B3B6A0D-D067-4D34-8631-91ABF30A2C5B}" dt="2024-02-29T07:49:19.714" v="2661" actId="1076"/>
-        <pc:sldMkLst>
-          <pc:docMk/>
-          <pc:sldMk cId="3422367261" sldId="365"/>
-        </pc:sldMkLst>
-      </pc:sldChg>
-      <pc:sldChg chg="modSp mod ord">
-        <pc:chgData name="MIGUEL TRIGUEROS MUÑOZ" userId="a4ee0321-97d7-430f-98a8-7ed13ff9a4bf" providerId="ADAL" clId="{5B3B6A0D-D067-4D34-8631-91ABF30A2C5B}" dt="2024-02-29T08:29:22.847" v="2867" actId="313"/>
-        <pc:sldMkLst>
-          <pc:docMk/>
-          <pc:sldMk cId="1115552724" sldId="366"/>
-        </pc:sldMkLst>
-      </pc:sldChg>
-      <pc:sldChg chg="addSp delSp modSp add mod modAnim modNotesTx">
-        <pc:chgData name="MIGUEL TRIGUEROS MUÑOZ" userId="a4ee0321-97d7-430f-98a8-7ed13ff9a4bf" providerId="ADAL" clId="{5B3B6A0D-D067-4D34-8631-91ABF30A2C5B}" dt="2024-02-25T10:47:37.343" v="2003"/>
-        <pc:sldMkLst>
-          <pc:docMk/>
-          <pc:sldMk cId="984522655" sldId="367"/>
-        </pc:sldMkLst>
-      </pc:sldChg>
-      <pc:sldChg chg="modSp add mod ord">
-        <pc:chgData name="MIGUEL TRIGUEROS MUÑOZ" userId="a4ee0321-97d7-430f-98a8-7ed13ff9a4bf" providerId="ADAL" clId="{5B3B6A0D-D067-4D34-8631-91ABF30A2C5B}" dt="2024-02-24T07:41:16.154" v="1393"/>
-        <pc:sldMkLst>
-          <pc:docMk/>
-          <pc:sldMk cId="3839625751" sldId="368"/>
-        </pc:sldMkLst>
-      </pc:sldChg>
-      <pc:sldChg chg="add ord">
-        <pc:chgData name="MIGUEL TRIGUEROS MUÑOZ" userId="a4ee0321-97d7-430f-98a8-7ed13ff9a4bf" providerId="ADAL" clId="{5B3B6A0D-D067-4D34-8631-91ABF30A2C5B}" dt="2024-02-24T07:51:09.250" v="1589"/>
-        <pc:sldMkLst>
-          <pc:docMk/>
-          <pc:sldMk cId="3715628655" sldId="369"/>
-        </pc:sldMkLst>
-      </pc:sldChg>
-      <pc:sldChg chg="modSp add del">
-        <pc:chgData name="MIGUEL TRIGUEROS MUÑOZ" userId="a4ee0321-97d7-430f-98a8-7ed13ff9a4bf" providerId="ADAL" clId="{5B3B6A0D-D067-4D34-8631-91ABF30A2C5B}" dt="2024-02-29T11:47:33.249" v="3618" actId="2696"/>
-        <pc:sldMkLst>
-          <pc:docMk/>
-          <pc:sldMk cId="1127960480" sldId="370"/>
-        </pc:sldMkLst>
-      </pc:sldChg>
-      <pc:sldChg chg="addSp delSp modSp add del mod delAnim">
-        <pc:chgData name="MIGUEL TRIGUEROS MUÑOZ" userId="a4ee0321-97d7-430f-98a8-7ed13ff9a4bf" providerId="ADAL" clId="{5B3B6A0D-D067-4D34-8631-91ABF30A2C5B}" dt="2024-03-03T11:04:05.132" v="4532" actId="47"/>
-        <pc:sldMkLst>
-          <pc:docMk/>
-          <pc:sldMk cId="2464792807" sldId="370"/>
-        </pc:sldMkLst>
-      </pc:sldChg>
-      <pc:sldChg chg="addSp delSp modSp add del mod delAnim">
-        <pc:chgData name="MIGUEL TRIGUEROS MUÑOZ" userId="a4ee0321-97d7-430f-98a8-7ed13ff9a4bf" providerId="ADAL" clId="{5B3B6A0D-D067-4D34-8631-91ABF30A2C5B}" dt="2024-03-03T10:36:39.821" v="4522" actId="47"/>
-        <pc:sldMkLst>
-          <pc:docMk/>
-          <pc:sldMk cId="3169159245" sldId="370"/>
-        </pc:sldMkLst>
-      </pc:sldChg>
-      <pc:sldChg chg="modSp add del">
-        <pc:chgData name="MIGUEL TRIGUEROS MUÑOZ" userId="a4ee0321-97d7-430f-98a8-7ed13ff9a4bf" providerId="ADAL" clId="{5B3B6A0D-D067-4D34-8631-91ABF30A2C5B}" dt="2024-02-29T11:47:20.629" v="3610" actId="2696"/>
-        <pc:sldMkLst>
-          <pc:docMk/>
-          <pc:sldMk cId="3894224546" sldId="370"/>
-        </pc:sldMkLst>
-      </pc:sldChg>
-    </pc:docChg>
-  </pc:docChgLst>
-  <pc:docChgLst>
-    <pc:chgData name="MIGUEL TRIGUEROS MUÑOZ" userId="a4ee0321-97d7-430f-98a8-7ed13ff9a4bf" providerId="ADAL" clId="{FC3E8AE7-67A9-4A51-B1E9-F7E40E630BDF}"/>
-    <pc:docChg chg="undo custSel delSld modSld sldOrd modMainMaster addSection delSection modSection">
-      <pc:chgData name="MIGUEL TRIGUEROS MUÑOZ" userId="a4ee0321-97d7-430f-98a8-7ed13ff9a4bf" providerId="ADAL" clId="{FC3E8AE7-67A9-4A51-B1E9-F7E40E630BDF}" dt="2024-10-11T08:09:13.138" v="79" actId="1076"/>
-      <pc:docMkLst>
-        <pc:docMk/>
-      </pc:docMkLst>
-      <pc:sldChg chg="addSp modSp mod chgLayout">
-        <pc:chgData name="MIGUEL TRIGUEROS MUÑOZ" userId="a4ee0321-97d7-430f-98a8-7ed13ff9a4bf" providerId="ADAL" clId="{FC3E8AE7-67A9-4A51-B1E9-F7E40E630BDF}" dt="2024-10-11T08:05:04.685" v="64" actId="20577"/>
-        <pc:sldMkLst>
-          <pc:docMk/>
-          <pc:sldMk cId="308865771" sldId="256"/>
-        </pc:sldMkLst>
-      </pc:sldChg>
-      <pc:sldChg chg="modSp mod modClrScheme chgLayout">
-        <pc:chgData name="MIGUEL TRIGUEROS MUÑOZ" userId="a4ee0321-97d7-430f-98a8-7ed13ff9a4bf" providerId="ADAL" clId="{FC3E8AE7-67A9-4A51-B1E9-F7E40E630BDF}" dt="2024-10-11T08:08:03.004" v="66" actId="700"/>
-        <pc:sldMkLst>
-          <pc:docMk/>
-          <pc:sldMk cId="1662085430" sldId="302"/>
-        </pc:sldMkLst>
-      </pc:sldChg>
-      <pc:sldChg chg="delSp modSp mod modClrScheme chgLayout">
-        <pc:chgData name="MIGUEL TRIGUEROS MUÑOZ" userId="a4ee0321-97d7-430f-98a8-7ed13ff9a4bf" providerId="ADAL" clId="{FC3E8AE7-67A9-4A51-B1E9-F7E40E630BDF}" dt="2024-10-11T08:04:30.537" v="62" actId="478"/>
-        <pc:sldMkLst>
-          <pc:docMk/>
-          <pc:sldMk cId="745458148" sldId="314"/>
-        </pc:sldMkLst>
-      </pc:sldChg>
-      <pc:sldChg chg="modSp del mod modClrScheme chgLayout">
-        <pc:chgData name="MIGUEL TRIGUEROS MUÑOZ" userId="a4ee0321-97d7-430f-98a8-7ed13ff9a4bf" providerId="ADAL" clId="{FC3E8AE7-67A9-4A51-B1E9-F7E40E630BDF}" dt="2024-10-11T08:03:33.533" v="55" actId="47"/>
-        <pc:sldMkLst>
-          <pc:docMk/>
-          <pc:sldMk cId="634721557" sldId="316"/>
-        </pc:sldMkLst>
-      </pc:sldChg>
-      <pc:sldChg chg="modSp del">
-        <pc:chgData name="MIGUEL TRIGUEROS MUÑOZ" userId="a4ee0321-97d7-430f-98a8-7ed13ff9a4bf" providerId="ADAL" clId="{FC3E8AE7-67A9-4A51-B1E9-F7E40E630BDF}" dt="2024-10-11T08:03:33.533" v="55" actId="47"/>
-        <pc:sldMkLst>
-          <pc:docMk/>
-          <pc:sldMk cId="2154345873" sldId="317"/>
-        </pc:sldMkLst>
-      </pc:sldChg>
-      <pc:sldChg chg="modSp del">
-        <pc:chgData name="MIGUEL TRIGUEROS MUÑOZ" userId="a4ee0321-97d7-430f-98a8-7ed13ff9a4bf" providerId="ADAL" clId="{FC3E8AE7-67A9-4A51-B1E9-F7E40E630BDF}" dt="2024-10-11T08:03:33.533" v="55" actId="47"/>
-        <pc:sldMkLst>
-          <pc:docMk/>
-          <pc:sldMk cId="3289438449" sldId="318"/>
-        </pc:sldMkLst>
-      </pc:sldChg>
-      <pc:sldChg chg="modSp del">
-        <pc:chgData name="MIGUEL TRIGUEROS MUÑOZ" userId="a4ee0321-97d7-430f-98a8-7ed13ff9a4bf" providerId="ADAL" clId="{FC3E8AE7-67A9-4A51-B1E9-F7E40E630BDF}" dt="2024-10-11T08:03:33.533" v="55" actId="47"/>
-        <pc:sldMkLst>
-          <pc:docMk/>
-          <pc:sldMk cId="1059083778" sldId="319"/>
-        </pc:sldMkLst>
-      </pc:sldChg>
-      <pc:sldChg chg="modSp del">
-        <pc:chgData name="MIGUEL TRIGUEROS MUÑOZ" userId="a4ee0321-97d7-430f-98a8-7ed13ff9a4bf" providerId="ADAL" clId="{FC3E8AE7-67A9-4A51-B1E9-F7E40E630BDF}" dt="2024-10-11T08:03:33.533" v="55" actId="47"/>
-        <pc:sldMkLst>
-          <pc:docMk/>
-          <pc:sldMk cId="3948044143" sldId="320"/>
-        </pc:sldMkLst>
-      </pc:sldChg>
-      <pc:sldChg chg="modSp del">
-        <pc:chgData name="MIGUEL TRIGUEROS MUÑOZ" userId="a4ee0321-97d7-430f-98a8-7ed13ff9a4bf" providerId="ADAL" clId="{FC3E8AE7-67A9-4A51-B1E9-F7E40E630BDF}" dt="2024-10-11T08:03:33.533" v="55" actId="47"/>
-        <pc:sldMkLst>
-          <pc:docMk/>
-          <pc:sldMk cId="3771477886" sldId="321"/>
-        </pc:sldMkLst>
-      </pc:sldChg>
-      <pc:sldChg chg="modSp del">
-        <pc:chgData name="MIGUEL TRIGUEROS MUÑOZ" userId="a4ee0321-97d7-430f-98a8-7ed13ff9a4bf" providerId="ADAL" clId="{FC3E8AE7-67A9-4A51-B1E9-F7E40E630BDF}" dt="2024-10-11T08:03:33.533" v="55" actId="47"/>
-        <pc:sldMkLst>
-          <pc:docMk/>
-          <pc:sldMk cId="675174442" sldId="322"/>
-        </pc:sldMkLst>
-      </pc:sldChg>
-      <pc:sldChg chg="modSp del">
-        <pc:chgData name="MIGUEL TRIGUEROS MUÑOZ" userId="a4ee0321-97d7-430f-98a8-7ed13ff9a4bf" providerId="ADAL" clId="{FC3E8AE7-67A9-4A51-B1E9-F7E40E630BDF}" dt="2024-10-11T08:03:33.533" v="55" actId="47"/>
-        <pc:sldMkLst>
-          <pc:docMk/>
-          <pc:sldMk cId="4268188109" sldId="323"/>
-        </pc:sldMkLst>
-      </pc:sldChg>
-      <pc:sldChg chg="modSp del">
-        <pc:chgData name="MIGUEL TRIGUEROS MUÑOZ" userId="a4ee0321-97d7-430f-98a8-7ed13ff9a4bf" providerId="ADAL" clId="{FC3E8AE7-67A9-4A51-B1E9-F7E40E630BDF}" dt="2024-10-11T08:03:33.533" v="55" actId="47"/>
-        <pc:sldMkLst>
-          <pc:docMk/>
-          <pc:sldMk cId="4205591290" sldId="324"/>
-        </pc:sldMkLst>
-      </pc:sldChg>
-      <pc:sldChg chg="modSp del">
-        <pc:chgData name="MIGUEL TRIGUEROS MUÑOZ" userId="a4ee0321-97d7-430f-98a8-7ed13ff9a4bf" providerId="ADAL" clId="{FC3E8AE7-67A9-4A51-B1E9-F7E40E630BDF}" dt="2024-10-11T08:03:33.533" v="55" actId="47"/>
-        <pc:sldMkLst>
-          <pc:docMk/>
-          <pc:sldMk cId="3317774778" sldId="325"/>
-        </pc:sldMkLst>
-      </pc:sldChg>
-      <pc:sldChg chg="modSp del">
-        <pc:chgData name="MIGUEL TRIGUEROS MUÑOZ" userId="a4ee0321-97d7-430f-98a8-7ed13ff9a4bf" providerId="ADAL" clId="{FC3E8AE7-67A9-4A51-B1E9-F7E40E630BDF}" dt="2024-10-11T08:03:33.533" v="55" actId="47"/>
-        <pc:sldMkLst>
-          <pc:docMk/>
-          <pc:sldMk cId="94322529" sldId="326"/>
-        </pc:sldMkLst>
-      </pc:sldChg>
-      <pc:sldChg chg="modSp mod modClrScheme chgLayout">
-        <pc:chgData name="MIGUEL TRIGUEROS MUÑOZ" userId="a4ee0321-97d7-430f-98a8-7ed13ff9a4bf" providerId="ADAL" clId="{FC3E8AE7-67A9-4A51-B1E9-F7E40E630BDF}" dt="2024-10-11T08:08:23.730" v="71" actId="1076"/>
-        <pc:sldMkLst>
-          <pc:docMk/>
-          <pc:sldMk cId="2044085444" sldId="327"/>
-        </pc:sldMkLst>
-      </pc:sldChg>
-      <pc:sldChg chg="modSp mod modClrScheme chgLayout">
-        <pc:chgData name="MIGUEL TRIGUEROS MUÑOZ" userId="a4ee0321-97d7-430f-98a8-7ed13ff9a4bf" providerId="ADAL" clId="{FC3E8AE7-67A9-4A51-B1E9-F7E40E630BDF}" dt="2024-10-11T08:08:03.004" v="66" actId="700"/>
-        <pc:sldMkLst>
-          <pc:docMk/>
-          <pc:sldMk cId="155112023" sldId="328"/>
-        </pc:sldMkLst>
-      </pc:sldChg>
-      <pc:sldChg chg="modSp mod modClrScheme chgLayout">
-        <pc:chgData name="MIGUEL TRIGUEROS MUÑOZ" userId="a4ee0321-97d7-430f-98a8-7ed13ff9a4bf" providerId="ADAL" clId="{FC3E8AE7-67A9-4A51-B1E9-F7E40E630BDF}" dt="2024-10-11T08:08:03.004" v="66" actId="700"/>
-        <pc:sldMkLst>
-          <pc:docMk/>
-          <pc:sldMk cId="1498135890" sldId="329"/>
-        </pc:sldMkLst>
-      </pc:sldChg>
-      <pc:sldChg chg="modSp mod modClrScheme chgLayout">
-        <pc:chgData name="MIGUEL TRIGUEROS MUÑOZ" userId="a4ee0321-97d7-430f-98a8-7ed13ff9a4bf" providerId="ADAL" clId="{FC3E8AE7-67A9-4A51-B1E9-F7E40E630BDF}" dt="2024-10-11T08:08:03.004" v="66" actId="700"/>
-        <pc:sldMkLst>
-          <pc:docMk/>
-          <pc:sldMk cId="385184565" sldId="330"/>
-        </pc:sldMkLst>
-      </pc:sldChg>
-      <pc:sldChg chg="modSp mod modClrScheme chgLayout">
-        <pc:chgData name="MIGUEL TRIGUEROS MUÑOZ" userId="a4ee0321-97d7-430f-98a8-7ed13ff9a4bf" providerId="ADAL" clId="{FC3E8AE7-67A9-4A51-B1E9-F7E40E630BDF}" dt="2024-10-11T08:08:03.004" v="66" actId="700"/>
-        <pc:sldMkLst>
-          <pc:docMk/>
-          <pc:sldMk cId="3659872342" sldId="332"/>
-        </pc:sldMkLst>
-      </pc:sldChg>
-      <pc:sldChg chg="modSp mod modClrScheme chgLayout">
-        <pc:chgData name="MIGUEL TRIGUEROS MUÑOZ" userId="a4ee0321-97d7-430f-98a8-7ed13ff9a4bf" providerId="ADAL" clId="{FC3E8AE7-67A9-4A51-B1E9-F7E40E630BDF}" dt="2024-10-11T08:09:13.138" v="79" actId="1076"/>
-        <pc:sldMkLst>
-          <pc:docMk/>
-          <pc:sldMk cId="952270227" sldId="333"/>
-        </pc:sldMkLst>
-      </pc:sldChg>
-      <pc:sldChg chg="addSp modSp mod modClrScheme chgLayout">
-        <pc:chgData name="MIGUEL TRIGUEROS MUÑOZ" userId="a4ee0321-97d7-430f-98a8-7ed13ff9a4bf" providerId="ADAL" clId="{FC3E8AE7-67A9-4A51-B1E9-F7E40E630BDF}" dt="2024-10-11T08:08:03.004" v="66" actId="700"/>
-        <pc:sldMkLst>
-          <pc:docMk/>
-          <pc:sldMk cId="520146235" sldId="340"/>
-        </pc:sldMkLst>
-      </pc:sldChg>
-      <pc:sldChg chg="modSp mod ord modClrScheme chgLayout">
-        <pc:chgData name="MIGUEL TRIGUEROS MUÑOZ" userId="a4ee0321-97d7-430f-98a8-7ed13ff9a4bf" providerId="ADAL" clId="{FC3E8AE7-67A9-4A51-B1E9-F7E40E630BDF}" dt="2024-10-11T08:01:59.781" v="44"/>
-        <pc:sldMkLst>
-          <pc:docMk/>
-          <pc:sldMk cId="1536049848" sldId="347"/>
-        </pc:sldMkLst>
-      </pc:sldChg>
-      <pc:sldChg chg="modSp mod modClrScheme chgLayout">
-        <pc:chgData name="MIGUEL TRIGUEROS MUÑOZ" userId="a4ee0321-97d7-430f-98a8-7ed13ff9a4bf" providerId="ADAL" clId="{FC3E8AE7-67A9-4A51-B1E9-F7E40E630BDF}" dt="2024-10-11T08:09:01.333" v="77" actId="1076"/>
-        <pc:sldMkLst>
-          <pc:docMk/>
-          <pc:sldMk cId="2896794478" sldId="348"/>
-        </pc:sldMkLst>
-      </pc:sldChg>
-      <pc:sldChg chg="modSp mod ord modClrScheme chgLayout">
-        <pc:chgData name="MIGUEL TRIGUEROS MUÑOZ" userId="a4ee0321-97d7-430f-98a8-7ed13ff9a4bf" providerId="ADAL" clId="{FC3E8AE7-67A9-4A51-B1E9-F7E40E630BDF}" dt="2024-10-11T08:02:09.931" v="52" actId="20578"/>
-        <pc:sldMkLst>
-          <pc:docMk/>
-          <pc:sldMk cId="75957562" sldId="350"/>
-        </pc:sldMkLst>
-      </pc:sldChg>
-      <pc:sldChg chg="modSp mod modClrScheme chgLayout">
-        <pc:chgData name="MIGUEL TRIGUEROS MUÑOZ" userId="a4ee0321-97d7-430f-98a8-7ed13ff9a4bf" providerId="ADAL" clId="{FC3E8AE7-67A9-4A51-B1E9-F7E40E630BDF}" dt="2024-10-11T08:01:11.023" v="39" actId="700"/>
-        <pc:sldMkLst>
-          <pc:docMk/>
-          <pc:sldMk cId="1962823157" sldId="351"/>
-        </pc:sldMkLst>
-      </pc:sldChg>
-      <pc:sldChg chg="modSp mod modClrScheme chgLayout">
-        <pc:chgData name="MIGUEL TRIGUEROS MUÑOZ" userId="a4ee0321-97d7-430f-98a8-7ed13ff9a4bf" providerId="ADAL" clId="{FC3E8AE7-67A9-4A51-B1E9-F7E40E630BDF}" dt="2024-10-11T08:01:11.023" v="39" actId="700"/>
-        <pc:sldMkLst>
-          <pc:docMk/>
-          <pc:sldMk cId="3809256849" sldId="352"/>
-        </pc:sldMkLst>
-      </pc:sldChg>
-      <pc:sldChg chg="modSp mod modClrScheme chgLayout">
-        <pc:chgData name="MIGUEL TRIGUEROS MUÑOZ" userId="a4ee0321-97d7-430f-98a8-7ed13ff9a4bf" providerId="ADAL" clId="{FC3E8AE7-67A9-4A51-B1E9-F7E40E630BDF}" dt="2024-10-11T08:01:11.023" v="39" actId="700"/>
-        <pc:sldMkLst>
-          <pc:docMk/>
-          <pc:sldMk cId="3325289584" sldId="353"/>
-        </pc:sldMkLst>
-      </pc:sldChg>
-      <pc:sldChg chg="modSp mod ord modClrScheme chgLayout">
-        <pc:chgData name="MIGUEL TRIGUEROS MUÑOZ" userId="a4ee0321-97d7-430f-98a8-7ed13ff9a4bf" providerId="ADAL" clId="{FC3E8AE7-67A9-4A51-B1E9-F7E40E630BDF}" dt="2024-10-11T08:02:08.319" v="51" actId="20578"/>
-        <pc:sldMkLst>
-          <pc:docMk/>
-          <pc:sldMk cId="2503801394" sldId="354"/>
-        </pc:sldMkLst>
-      </pc:sldChg>
-      <pc:sldChg chg="modSp mod modClrScheme chgLayout">
-        <pc:chgData name="MIGUEL TRIGUEROS MUÑOZ" userId="a4ee0321-97d7-430f-98a8-7ed13ff9a4bf" providerId="ADAL" clId="{FC3E8AE7-67A9-4A51-B1E9-F7E40E630BDF}" dt="2024-10-11T08:01:11.023" v="39" actId="700"/>
-        <pc:sldMkLst>
-          <pc:docMk/>
-          <pc:sldMk cId="2618476077" sldId="355"/>
-        </pc:sldMkLst>
-      </pc:sldChg>
-      <pc:sldChg chg="modSp del">
-        <pc:chgData name="MIGUEL TRIGUEROS MUÑOZ" userId="a4ee0321-97d7-430f-98a8-7ed13ff9a4bf" providerId="ADAL" clId="{FC3E8AE7-67A9-4A51-B1E9-F7E40E630BDF}" dt="2024-10-11T08:03:33.533" v="55" actId="47"/>
-        <pc:sldMkLst>
-          <pc:docMk/>
-          <pc:sldMk cId="3249296326" sldId="356"/>
-        </pc:sldMkLst>
-      </pc:sldChg>
-      <pc:sldChg chg="modSp del">
-        <pc:chgData name="MIGUEL TRIGUEROS MUÑOZ" userId="a4ee0321-97d7-430f-98a8-7ed13ff9a4bf" providerId="ADAL" clId="{FC3E8AE7-67A9-4A51-B1E9-F7E40E630BDF}" dt="2024-10-11T08:03:33.533" v="55" actId="47"/>
-        <pc:sldMkLst>
-          <pc:docMk/>
-          <pc:sldMk cId="3660112489" sldId="357"/>
-        </pc:sldMkLst>
-      </pc:sldChg>
-      <pc:sldChg chg="modSp del">
-        <pc:chgData name="MIGUEL TRIGUEROS MUÑOZ" userId="a4ee0321-97d7-430f-98a8-7ed13ff9a4bf" providerId="ADAL" clId="{FC3E8AE7-67A9-4A51-B1E9-F7E40E630BDF}" dt="2024-10-11T08:03:33.533" v="55" actId="47"/>
-        <pc:sldMkLst>
-          <pc:docMk/>
-          <pc:sldMk cId="3427303393" sldId="358"/>
-        </pc:sldMkLst>
-      </pc:sldChg>
-      <pc:sldChg chg="modSp del">
-        <pc:chgData name="MIGUEL TRIGUEROS MUÑOZ" userId="a4ee0321-97d7-430f-98a8-7ed13ff9a4bf" providerId="ADAL" clId="{FC3E8AE7-67A9-4A51-B1E9-F7E40E630BDF}" dt="2024-10-11T08:03:33.533" v="55" actId="47"/>
-        <pc:sldMkLst>
-          <pc:docMk/>
-          <pc:sldMk cId="2538212918" sldId="359"/>
-        </pc:sldMkLst>
-      </pc:sldChg>
-      <pc:sldChg chg="addSp delSp modSp del mod chgLayout">
-        <pc:chgData name="MIGUEL TRIGUEROS MUÑOZ" userId="a4ee0321-97d7-430f-98a8-7ed13ff9a4bf" providerId="ADAL" clId="{FC3E8AE7-67A9-4A51-B1E9-F7E40E630BDF}" dt="2024-10-11T08:03:57.979" v="60" actId="47"/>
-        <pc:sldMkLst>
-          <pc:docMk/>
-          <pc:sldMk cId="2860104298" sldId="360"/>
-        </pc:sldMkLst>
-      </pc:sldChg>
-      <pc:sldChg chg="modSp">
-        <pc:chgData name="MIGUEL TRIGUEROS MUÑOZ" userId="a4ee0321-97d7-430f-98a8-7ed13ff9a4bf" providerId="ADAL" clId="{FC3E8AE7-67A9-4A51-B1E9-F7E40E630BDF}" dt="2024-10-11T07:58:51.437" v="30"/>
-        <pc:sldMkLst>
-          <pc:docMk/>
-          <pc:sldMk cId="126456270" sldId="361"/>
-        </pc:sldMkLst>
-      </pc:sldChg>
-      <pc:sldChg chg="modSp mod modClrScheme chgLayout">
-        <pc:chgData name="MIGUEL TRIGUEROS MUÑOZ" userId="a4ee0321-97d7-430f-98a8-7ed13ff9a4bf" providerId="ADAL" clId="{FC3E8AE7-67A9-4A51-B1E9-F7E40E630BDF}" dt="2024-10-11T08:08:03.004" v="66" actId="700"/>
-        <pc:sldMkLst>
-          <pc:docMk/>
-          <pc:sldMk cId="557761139" sldId="362"/>
-        </pc:sldMkLst>
-      </pc:sldChg>
-      <pc:sldChg chg="modSp">
-        <pc:chgData name="MIGUEL TRIGUEROS MUÑOZ" userId="a4ee0321-97d7-430f-98a8-7ed13ff9a4bf" providerId="ADAL" clId="{FC3E8AE7-67A9-4A51-B1E9-F7E40E630BDF}" dt="2024-10-11T07:58:51.437" v="30"/>
-        <pc:sldMkLst>
-          <pc:docMk/>
-          <pc:sldMk cId="2951450419" sldId="363"/>
-        </pc:sldMkLst>
-      </pc:sldChg>
-      <pc:sldChg chg="modSp mod ord modClrScheme chgLayout">
-        <pc:chgData name="MIGUEL TRIGUEROS MUÑOZ" userId="a4ee0321-97d7-430f-98a8-7ed13ff9a4bf" providerId="ADAL" clId="{FC3E8AE7-67A9-4A51-B1E9-F7E40E630BDF}" dt="2024-10-11T08:02:01.092" v="46"/>
-        <pc:sldMkLst>
-          <pc:docMk/>
-          <pc:sldMk cId="941241975" sldId="364"/>
-        </pc:sldMkLst>
-      </pc:sldChg>
-      <pc:sldChg chg="modSp mod modClrScheme chgLayout">
-        <pc:chgData name="MIGUEL TRIGUEROS MUÑOZ" userId="a4ee0321-97d7-430f-98a8-7ed13ff9a4bf" providerId="ADAL" clId="{FC3E8AE7-67A9-4A51-B1E9-F7E40E630BDF}" dt="2024-10-11T08:09:07.648" v="78" actId="1076"/>
-        <pc:sldMkLst>
-          <pc:docMk/>
-          <pc:sldMk cId="3422367261" sldId="365"/>
-        </pc:sldMkLst>
-      </pc:sldChg>
-      <pc:sldChg chg="modSp mod modClrScheme chgLayout">
-        <pc:chgData name="MIGUEL TRIGUEROS MUÑOZ" userId="a4ee0321-97d7-430f-98a8-7ed13ff9a4bf" providerId="ADAL" clId="{FC3E8AE7-67A9-4A51-B1E9-F7E40E630BDF}" dt="2024-10-11T08:08:03.004" v="66" actId="700"/>
-        <pc:sldMkLst>
-          <pc:docMk/>
-          <pc:sldMk cId="1115552724" sldId="366"/>
-        </pc:sldMkLst>
-      </pc:sldChg>
-      <pc:sldChg chg="modSp del">
-        <pc:chgData name="MIGUEL TRIGUEROS MUÑOZ" userId="a4ee0321-97d7-430f-98a8-7ed13ff9a4bf" providerId="ADAL" clId="{FC3E8AE7-67A9-4A51-B1E9-F7E40E630BDF}" dt="2024-10-11T08:03:33.533" v="55" actId="47"/>
-        <pc:sldMkLst>
-          <pc:docMk/>
-          <pc:sldMk cId="984522655" sldId="367"/>
-        </pc:sldMkLst>
-      </pc:sldChg>
-      <pc:sldChg chg="modSp del">
-        <pc:chgData name="MIGUEL TRIGUEROS MUÑOZ" userId="a4ee0321-97d7-430f-98a8-7ed13ff9a4bf" providerId="ADAL" clId="{FC3E8AE7-67A9-4A51-B1E9-F7E40E630BDF}" dt="2024-10-11T08:03:33.533" v="55" actId="47"/>
-        <pc:sldMkLst>
-          <pc:docMk/>
-          <pc:sldMk cId="3839625751" sldId="368"/>
-        </pc:sldMkLst>
-      </pc:sldChg>
-      <pc:sldChg chg="modSp del">
-        <pc:chgData name="MIGUEL TRIGUEROS MUÑOZ" userId="a4ee0321-97d7-430f-98a8-7ed13ff9a4bf" providerId="ADAL" clId="{FC3E8AE7-67A9-4A51-B1E9-F7E40E630BDF}" dt="2024-10-11T08:03:33.533" v="55" actId="47"/>
-        <pc:sldMkLst>
-          <pc:docMk/>
-          <pc:sldMk cId="3715628655" sldId="369"/>
-        </pc:sldMkLst>
-      </pc:sldChg>
-      <pc:sldMasterChg chg="addSp modSldLayout">
-        <pc:chgData name="MIGUEL TRIGUEROS MUÑOZ" userId="a4ee0321-97d7-430f-98a8-7ed13ff9a4bf" providerId="ADAL" clId="{FC3E8AE7-67A9-4A51-B1E9-F7E40E630BDF}" dt="2024-10-11T07:58:51.437" v="30"/>
-        <pc:sldMasterMkLst>
-          <pc:docMk/>
-          <pc:sldMasterMk cId="48007759" sldId="2147483686"/>
-        </pc:sldMasterMkLst>
-        <pc:sldLayoutChg chg="modSp">
-          <pc:chgData name="MIGUEL TRIGUEROS MUÑOZ" userId="a4ee0321-97d7-430f-98a8-7ed13ff9a4bf" providerId="ADAL" clId="{FC3E8AE7-67A9-4A51-B1E9-F7E40E630BDF}" dt="2024-10-11T07:58:51.437" v="30"/>
-          <pc:sldLayoutMkLst>
-            <pc:docMk/>
-            <pc:sldMasterMk cId="48007759" sldId="2147483686"/>
-            <pc:sldLayoutMk cId="2151700916" sldId="2147483669"/>
-          </pc:sldLayoutMkLst>
-        </pc:sldLayoutChg>
-      </pc:sldMasterChg>
-    </pc:docChg>
-  </pc:docChgLst>
-  <pc:docChgLst>
-    <pc:chgData name="MIGUEL TRIGUEROS MUÑOZ" userId="a4ee0321-97d7-430f-98a8-7ed13ff9a4bf" providerId="ADAL" clId="{1A2524F0-11E5-48C4-86DF-E5310B4EF233}"/>
-    <pc:docChg chg="undo custSel modSld sldOrd">
-      <pc:chgData name="MIGUEL TRIGUEROS MUÑOZ" userId="a4ee0321-97d7-430f-98a8-7ed13ff9a4bf" providerId="ADAL" clId="{1A2524F0-11E5-48C4-86DF-E5310B4EF233}" dt="2024-02-14T08:19:21.813" v="67"/>
-      <pc:docMkLst>
-        <pc:docMk/>
-      </pc:docMkLst>
-      <pc:sldChg chg="modSp mod">
-        <pc:chgData name="MIGUEL TRIGUEROS MUÑOZ" userId="a4ee0321-97d7-430f-98a8-7ed13ff9a4bf" providerId="ADAL" clId="{1A2524F0-11E5-48C4-86DF-E5310B4EF233}" dt="2024-02-12T10:05:01.091" v="18" actId="20577"/>
-        <pc:sldMkLst>
-          <pc:docMk/>
-          <pc:sldMk cId="3948044143" sldId="320"/>
-        </pc:sldMkLst>
-      </pc:sldChg>
-      <pc:sldChg chg="modSp mod">
-        <pc:chgData name="MIGUEL TRIGUEROS MUÑOZ" userId="a4ee0321-97d7-430f-98a8-7ed13ff9a4bf" providerId="ADAL" clId="{1A2524F0-11E5-48C4-86DF-E5310B4EF233}" dt="2024-02-12T11:16:42.669" v="61" actId="15"/>
-        <pc:sldMkLst>
-          <pc:docMk/>
-          <pc:sldMk cId="94322529" sldId="326"/>
-        </pc:sldMkLst>
-      </pc:sldChg>
-      <pc:sldChg chg="modSp mod">
-        <pc:chgData name="MIGUEL TRIGUEROS MUÑOZ" userId="a4ee0321-97d7-430f-98a8-7ed13ff9a4bf" providerId="ADAL" clId="{1A2524F0-11E5-48C4-86DF-E5310B4EF233}" dt="2024-02-14T08:18:49.180" v="65" actId="27636"/>
-        <pc:sldMkLst>
-          <pc:docMk/>
-          <pc:sldMk cId="270283012" sldId="336"/>
-        </pc:sldMkLst>
-      </pc:sldChg>
-      <pc:sldChg chg="ord">
-        <pc:chgData name="MIGUEL TRIGUEROS MUÑOZ" userId="a4ee0321-97d7-430f-98a8-7ed13ff9a4bf" providerId="ADAL" clId="{1A2524F0-11E5-48C4-86DF-E5310B4EF233}" dt="2024-02-14T08:19:21.813" v="67"/>
-        <pc:sldMkLst>
-          <pc:docMk/>
-          <pc:sldMk cId="3066266296" sldId="337"/>
-        </pc:sldMkLst>
-      </pc:sldChg>
-    </pc:docChg>
-  </pc:docChgLst>
-  <pc:docChgLst>
-    <pc:chgData name="Miguel Trigueros Muñoz" userId="7753574ed83b4f98" providerId="LiveId" clId="{89D32F01-F4EF-46F7-9100-DAE74FAD5D28}"/>
-    <pc:docChg chg="undo custSel addSld delSld modSld modSection">
-      <pc:chgData name="Miguel Trigueros Muñoz" userId="7753574ed83b4f98" providerId="LiveId" clId="{89D32F01-F4EF-46F7-9100-DAE74FAD5D28}" dt="2025-07-08T16:51:19.533" v="1050" actId="20577"/>
-      <pc:docMkLst>
-        <pc:docMk/>
-      </pc:docMkLst>
-      <pc:sldChg chg="delSp modSp mod">
-        <pc:chgData name="Miguel Trigueros Muñoz" userId="7753574ed83b4f98" providerId="LiveId" clId="{89D32F01-F4EF-46F7-9100-DAE74FAD5D28}" dt="2025-07-08T15:40:52.303" v="842" actId="14100"/>
-        <pc:sldMkLst>
-          <pc:docMk/>
-          <pc:sldMk cId="308865771" sldId="256"/>
-        </pc:sldMkLst>
-        <pc:spChg chg="mod">
-          <ac:chgData name="Miguel Trigueros Muñoz" userId="7753574ed83b4f98" providerId="LiveId" clId="{89D32F01-F4EF-46F7-9100-DAE74FAD5D28}" dt="2025-06-25T18:30:18.534" v="3" actId="20577"/>
-          <ac:spMkLst>
-            <pc:docMk/>
-            <pc:sldMk cId="308865771" sldId="256"/>
-            <ac:spMk id="2" creationId="{BB6B5ACD-B995-716B-F5F7-1C14289F141D}"/>
-          </ac:spMkLst>
-        </pc:spChg>
-        <pc:spChg chg="mod">
-          <ac:chgData name="Miguel Trigueros Muñoz" userId="7753574ed83b4f98" providerId="LiveId" clId="{89D32F01-F4EF-46F7-9100-DAE74FAD5D28}" dt="2025-06-25T18:31:42.045" v="49" actId="1076"/>
-          <ac:spMkLst>
-            <pc:docMk/>
-            <pc:sldMk cId="308865771" sldId="256"/>
-            <ac:spMk id="9" creationId="{163AF1D7-99DA-EAC5-BC03-9B1BE7C81353}"/>
-          </ac:spMkLst>
-        </pc:spChg>
-        <pc:picChg chg="mod">
-          <ac:chgData name="Miguel Trigueros Muñoz" userId="7753574ed83b4f98" providerId="LiveId" clId="{89D32F01-F4EF-46F7-9100-DAE74FAD5D28}" dt="2025-07-08T15:40:52.303" v="842" actId="14100"/>
-          <ac:picMkLst>
-            <pc:docMk/>
-            <pc:sldMk cId="308865771" sldId="256"/>
-            <ac:picMk id="14" creationId="{ADF63C5B-BE0F-E937-B8B1-A9FA65EE0157}"/>
-          </ac:picMkLst>
-        </pc:picChg>
-      </pc:sldChg>
-      <pc:sldChg chg="modSp mod">
-        <pc:chgData name="Miguel Trigueros Muñoz" userId="7753574ed83b4f98" providerId="LiveId" clId="{89D32F01-F4EF-46F7-9100-DAE74FAD5D28}" dt="2025-06-25T18:32:03.317" v="50" actId="33524"/>
-        <pc:sldMkLst>
-          <pc:docMk/>
-          <pc:sldMk cId="745458148" sldId="314"/>
-        </pc:sldMkLst>
-        <pc:spChg chg="mod">
-          <ac:chgData name="Miguel Trigueros Muñoz" userId="7753574ed83b4f98" providerId="LiveId" clId="{89D32F01-F4EF-46F7-9100-DAE74FAD5D28}" dt="2025-06-25T18:32:03.317" v="50" actId="33524"/>
-          <ac:spMkLst>
-            <pc:docMk/>
-            <pc:sldMk cId="745458148" sldId="314"/>
-            <ac:spMk id="5" creationId="{B6810F6F-DB2A-ED7D-6A72-27AB303FFA23}"/>
-          </ac:spMkLst>
-        </pc:spChg>
-      </pc:sldChg>
-      <pc:sldChg chg="delSp modSp mod">
-        <pc:chgData name="Miguel Trigueros Muñoz" userId="7753574ed83b4f98" providerId="LiveId" clId="{89D32F01-F4EF-46F7-9100-DAE74FAD5D28}" dt="2025-06-26T16:19:32.140" v="826" actId="313"/>
-        <pc:sldMkLst>
-          <pc:docMk/>
-          <pc:sldMk cId="2044085444" sldId="327"/>
-        </pc:sldMkLst>
-        <pc:spChg chg="mod">
-          <ac:chgData name="Miguel Trigueros Muñoz" userId="7753574ed83b4f98" providerId="LiveId" clId="{89D32F01-F4EF-46F7-9100-DAE74FAD5D28}" dt="2025-06-26T16:19:32.140" v="826" actId="313"/>
-          <ac:spMkLst>
-            <pc:docMk/>
-            <pc:sldMk cId="2044085444" sldId="327"/>
-            <ac:spMk id="2" creationId="{252707BB-B390-514F-F117-3F51A96C85CC}"/>
-          </ac:spMkLst>
-        </pc:spChg>
-      </pc:sldChg>
-      <pc:sldChg chg="modSp mod modNotesTx">
-        <pc:chgData name="Miguel Trigueros Muñoz" userId="7753574ed83b4f98" providerId="LiveId" clId="{89D32F01-F4EF-46F7-9100-DAE74FAD5D28}" dt="2025-06-26T16:19:34.157" v="828" actId="313"/>
-        <pc:sldMkLst>
-          <pc:docMk/>
-          <pc:sldMk cId="155112023" sldId="328"/>
-        </pc:sldMkLst>
-        <pc:spChg chg="mod">
-          <ac:chgData name="Miguel Trigueros Muñoz" userId="7753574ed83b4f98" providerId="LiveId" clId="{89D32F01-F4EF-46F7-9100-DAE74FAD5D28}" dt="2025-06-26T16:19:34.157" v="828" actId="313"/>
-          <ac:spMkLst>
-            <pc:docMk/>
-            <pc:sldMk cId="155112023" sldId="328"/>
-            <ac:spMk id="2" creationId="{252707BB-B390-514F-F117-3F51A96C85CC}"/>
-          </ac:spMkLst>
-        </pc:spChg>
-      </pc:sldChg>
-      <pc:sldChg chg="modSp mod modNotesTx">
-        <pc:chgData name="Miguel Trigueros Muñoz" userId="7753574ed83b4f98" providerId="LiveId" clId="{89D32F01-F4EF-46F7-9100-DAE74FAD5D28}" dt="2025-06-26T16:19:35.017" v="829" actId="313"/>
+      <pc:sldChg chg="modSp modNotes">
+        <pc:chgData name="MIGUEL TRIGUEROS MUÑOZ" userId="S::miguel.trigueros@aulaxxi.murciaeduca.es::a4ee0321-97d7-430f-98a8-7ed13ff9a4bf" providerId="AD" clId="Web-{C32461E6-2C25-869D-4C9A-1017D71EFFF2}" dt="2026-02-15T11:49:53.620" v="146" actId="20577"/>
         <pc:sldMkLst>
           <pc:docMk/>
           <pc:sldMk cId="1498135890" sldId="329"/>
         </pc:sldMkLst>
         <pc:spChg chg="mod">
-          <ac:chgData name="Miguel Trigueros Muñoz" userId="7753574ed83b4f98" providerId="LiveId" clId="{89D32F01-F4EF-46F7-9100-DAE74FAD5D28}" dt="2025-06-26T16:19:35.017" v="829" actId="313"/>
+          <ac:chgData name="MIGUEL TRIGUEROS MUÑOZ" userId="S::miguel.trigueros@aulaxxi.murciaeduca.es::a4ee0321-97d7-430f-98a8-7ed13ff9a4bf" providerId="AD" clId="Web-{C32461E6-2C25-869D-4C9A-1017D71EFFF2}" dt="2026-02-15T11:49:53.620" v="146" actId="20577"/>
           <ac:spMkLst>
             <pc:docMk/>
             <pc:sldMk cId="1498135890" sldId="329"/>
-            <ac:spMk id="2" creationId="{252707BB-B390-514F-F117-3F51A96C85CC}"/>
+            <ac:spMk id="3" creationId="{BBD2C6B3-99D2-B9CC-5F50-ADD31ADFF127}"/>
+          </ac:spMkLst>
+        </pc:spChg>
+        <pc:picChg chg="mod">
+          <ac:chgData name="MIGUEL TRIGUEROS MUÑOZ" userId="S::miguel.trigueros@aulaxxi.murciaeduca.es::a4ee0321-97d7-430f-98a8-7ed13ff9a4bf" providerId="AD" clId="Web-{C32461E6-2C25-869D-4C9A-1017D71EFFF2}" dt="2026-02-15T11:48:07.584" v="32" actId="1076"/>
+          <ac:picMkLst>
+            <pc:docMk/>
+            <pc:sldMk cId="1498135890" sldId="329"/>
+            <ac:picMk id="6" creationId="{A1A97C83-3A42-486E-E145-16C2A4B77FBB}"/>
+          </ac:picMkLst>
+        </pc:picChg>
+      </pc:sldChg>
+    </pc:docChg>
+  </pc:docChgLst>
+  <pc:docChgLst>
+    <pc:chgData name="MIGUEL TRIGUEROS MUÑOZ" userId="S::miguel.trigueros@aulaxxi.murciaeduca.es::a4ee0321-97d7-430f-98a8-7ed13ff9a4bf" providerId="AD" clId="Web-{64D2F8E1-2E23-A18C-16A4-DF1CAE15C94F}"/>
+    <pc:docChg chg="modSld addSection delSection">
+      <pc:chgData name="MIGUEL TRIGUEROS MUÑOZ" userId="S::miguel.trigueros@aulaxxi.murciaeduca.es::a4ee0321-97d7-430f-98a8-7ed13ff9a4bf" providerId="AD" clId="Web-{64D2F8E1-2E23-A18C-16A4-DF1CAE15C94F}" dt="2026-02-02T09:19:35.767" v="42" actId="20577"/>
+      <pc:docMkLst>
+        <pc:docMk/>
+      </pc:docMkLst>
+      <pc:sldChg chg="modSp">
+        <pc:chgData name="MIGUEL TRIGUEROS MUÑOZ" userId="S::miguel.trigueros@aulaxxi.murciaeduca.es::a4ee0321-97d7-430f-98a8-7ed13ff9a4bf" providerId="AD" clId="Web-{64D2F8E1-2E23-A18C-16A4-DF1CAE15C94F}" dt="2026-02-02T09:14:31.117" v="10" actId="20577"/>
+        <pc:sldMkLst>
+          <pc:docMk/>
+          <pc:sldMk cId="1662085430" sldId="302"/>
+        </pc:sldMkLst>
+        <pc:spChg chg="mod">
+          <ac:chgData name="MIGUEL TRIGUEROS MUÑOZ" userId="S::miguel.trigueros@aulaxxi.murciaeduca.es::a4ee0321-97d7-430f-98a8-7ed13ff9a4bf" providerId="AD" clId="Web-{64D2F8E1-2E23-A18C-16A4-DF1CAE15C94F}" dt="2026-02-02T09:14:31.117" v="10" actId="20577"/>
+          <ac:spMkLst>
+            <pc:docMk/>
+            <pc:sldMk cId="1662085430" sldId="302"/>
+            <ac:spMk id="5" creationId="{2E672CE3-414F-1E3C-9928-F4B6B7568735}"/>
           </ac:spMkLst>
         </pc:spChg>
       </pc:sldChg>
-      <pc:sldChg chg="modSp mod modNotesTx">
-        <pc:chgData name="Miguel Trigueros Muñoz" userId="7753574ed83b4f98" providerId="LiveId" clId="{89D32F01-F4EF-46F7-9100-DAE74FAD5D28}" dt="2025-06-26T16:19:35.516" v="830" actId="313"/>
-        <pc:sldMkLst>
-          <pc:docMk/>
-          <pc:sldMk cId="385184565" sldId="330"/>
-        </pc:sldMkLst>
-        <pc:spChg chg="mod">
-          <ac:chgData name="Miguel Trigueros Muñoz" userId="7753574ed83b4f98" providerId="LiveId" clId="{89D32F01-F4EF-46F7-9100-DAE74FAD5D28}" dt="2025-06-26T16:19:35.516" v="830" actId="313"/>
-          <ac:spMkLst>
-            <pc:docMk/>
-            <pc:sldMk cId="385184565" sldId="330"/>
-            <ac:spMk id="2" creationId="{252707BB-B390-514F-F117-3F51A96C85CC}"/>
-          </ac:spMkLst>
-        </pc:spChg>
-      </pc:sldChg>
-      <pc:sldChg chg="modSp mod modNotesTx">
-        <pc:chgData name="Miguel Trigueros Muñoz" userId="7753574ed83b4f98" providerId="LiveId" clId="{89D32F01-F4EF-46F7-9100-DAE74FAD5D28}" dt="2025-06-26T16:19:35.965" v="831" actId="313"/>
-        <pc:sldMkLst>
-          <pc:docMk/>
-          <pc:sldMk cId="3659872342" sldId="332"/>
-        </pc:sldMkLst>
-        <pc:spChg chg="mod">
-          <ac:chgData name="Miguel Trigueros Muñoz" userId="7753574ed83b4f98" providerId="LiveId" clId="{89D32F01-F4EF-46F7-9100-DAE74FAD5D28}" dt="2025-06-26T16:19:35.965" v="831" actId="313"/>
-          <ac:spMkLst>
-            <pc:docMk/>
-            <pc:sldMk cId="3659872342" sldId="332"/>
-            <ac:spMk id="2" creationId="{252707BB-B390-514F-F117-3F51A96C85CC}"/>
-          </ac:spMkLst>
-        </pc:spChg>
-      </pc:sldChg>
-      <pc:sldChg chg="modSp del mod">
-        <pc:chgData name="Miguel Trigueros Muñoz" userId="7753574ed83b4f98" providerId="LiveId" clId="{89D32F01-F4EF-46F7-9100-DAE74FAD5D28}" dt="2025-07-08T16:12:10.439" v="957" actId="2696"/>
-        <pc:sldMkLst>
-          <pc:docMk/>
-          <pc:sldMk cId="952270227" sldId="333"/>
-        </pc:sldMkLst>
-      </pc:sldChg>
-      <pc:sldChg chg="modSp del mod">
-        <pc:chgData name="Miguel Trigueros Muñoz" userId="7753574ed83b4f98" providerId="LiveId" clId="{89D32F01-F4EF-46F7-9100-DAE74FAD5D28}" dt="2025-07-08T16:12:06.846" v="956" actId="2696"/>
-        <pc:sldMkLst>
-          <pc:docMk/>
-          <pc:sldMk cId="520146235" sldId="340"/>
-        </pc:sldMkLst>
-      </pc:sldChg>
-      <pc:sldChg chg="modSp mod modNotesTx">
-        <pc:chgData name="Miguel Trigueros Muñoz" userId="7753574ed83b4f98" providerId="LiveId" clId="{89D32F01-F4EF-46F7-9100-DAE74FAD5D28}" dt="2025-07-08T15:41:44.014" v="848" actId="1076"/>
-        <pc:sldMkLst>
-          <pc:docMk/>
-          <pc:sldMk cId="1536049848" sldId="347"/>
-        </pc:sldMkLst>
-        <pc:picChg chg="mod">
-          <ac:chgData name="Miguel Trigueros Muñoz" userId="7753574ed83b4f98" providerId="LiveId" clId="{89D32F01-F4EF-46F7-9100-DAE74FAD5D28}" dt="2025-07-08T15:41:04.604" v="843" actId="1076"/>
-          <ac:picMkLst>
-            <pc:docMk/>
-            <pc:sldMk cId="1536049848" sldId="347"/>
-            <ac:picMk id="8" creationId="{9CAB4FD1-2285-8E75-9E33-7ACBB3CE531B}"/>
-          </ac:picMkLst>
-        </pc:picChg>
-        <pc:picChg chg="mod">
-          <ac:chgData name="Miguel Trigueros Muñoz" userId="7753574ed83b4f98" providerId="LiveId" clId="{89D32F01-F4EF-46F7-9100-DAE74FAD5D28}" dt="2025-07-08T15:41:44.014" v="848" actId="1076"/>
-          <ac:picMkLst>
-            <pc:docMk/>
-            <pc:sldMk cId="1536049848" sldId="347"/>
-            <ac:picMk id="11" creationId="{E36E1281-15EF-206A-0466-18B42DDF2636}"/>
-          </ac:picMkLst>
-        </pc:picChg>
-      </pc:sldChg>
-      <pc:sldChg chg="modSp mod">
-        <pc:chgData name="Miguel Trigueros Muñoz" userId="7753574ed83b4f98" providerId="LiveId" clId="{89D32F01-F4EF-46F7-9100-DAE74FAD5D28}" dt="2025-06-26T16:19:38.659" v="835" actId="313"/>
-        <pc:sldMkLst>
-          <pc:docMk/>
-          <pc:sldMk cId="2896794478" sldId="348"/>
-        </pc:sldMkLst>
-        <pc:spChg chg="mod">
-          <ac:chgData name="Miguel Trigueros Muñoz" userId="7753574ed83b4f98" providerId="LiveId" clId="{89D32F01-F4EF-46F7-9100-DAE74FAD5D28}" dt="2025-06-26T16:19:38.659" v="835" actId="313"/>
-          <ac:spMkLst>
-            <pc:docMk/>
-            <pc:sldMk cId="2896794478" sldId="348"/>
-            <ac:spMk id="2" creationId="{8C4ABA96-93B4-5474-A900-BB0A6B344535}"/>
-          </ac:spMkLst>
-        </pc:spChg>
-      </pc:sldChg>
-      <pc:sldChg chg="addSp modSp mod modNotesTx">
-        <pc:chgData name="Miguel Trigueros Muñoz" userId="7753574ed83b4f98" providerId="LiveId" clId="{89D32F01-F4EF-46F7-9100-DAE74FAD5D28}" dt="2025-06-26T15:35:08.795" v="427" actId="20577"/>
-        <pc:sldMkLst>
-          <pc:docMk/>
-          <pc:sldMk cId="75957562" sldId="350"/>
-        </pc:sldMkLst>
-        <pc:spChg chg="mod">
-          <ac:chgData name="Miguel Trigueros Muñoz" userId="7753574ed83b4f98" providerId="LiveId" clId="{89D32F01-F4EF-46F7-9100-DAE74FAD5D28}" dt="2025-06-26T15:33:40.049" v="263" actId="207"/>
-          <ac:spMkLst>
-            <pc:docMk/>
-            <pc:sldMk cId="75957562" sldId="350"/>
-            <ac:spMk id="3" creationId="{C73DADBF-3FE8-E3AA-5846-D7251D95774F}"/>
-          </ac:spMkLst>
-        </pc:spChg>
-        <pc:spChg chg="add mod">
-          <ac:chgData name="Miguel Trigueros Muñoz" userId="7753574ed83b4f98" providerId="LiveId" clId="{89D32F01-F4EF-46F7-9100-DAE74FAD5D28}" dt="2025-06-26T15:34:15.906" v="284" actId="20577"/>
-          <ac:spMkLst>
-            <pc:docMk/>
-            <pc:sldMk cId="75957562" sldId="350"/>
-            <ac:spMk id="5" creationId="{66530EB5-9F4B-2769-FD30-EB82D7599CB6}"/>
-          </ac:spMkLst>
-        </pc:spChg>
-      </pc:sldChg>
-      <pc:sldChg chg="addSp delSp modSp mod">
-        <pc:chgData name="Miguel Trigueros Muñoz" userId="7753574ed83b4f98" providerId="LiveId" clId="{89D32F01-F4EF-46F7-9100-DAE74FAD5D28}" dt="2025-07-08T16:37:02.665" v="1009" actId="1076"/>
-        <pc:sldMkLst>
-          <pc:docMk/>
-          <pc:sldMk cId="1962823157" sldId="351"/>
-        </pc:sldMkLst>
-        <pc:spChg chg="mod">
-          <ac:chgData name="Miguel Trigueros Muñoz" userId="7753574ed83b4f98" providerId="LiveId" clId="{89D32F01-F4EF-46F7-9100-DAE74FAD5D28}" dt="2025-07-08T15:44:43.470" v="853" actId="6549"/>
-          <ac:spMkLst>
-            <pc:docMk/>
-            <pc:sldMk cId="1962823157" sldId="351"/>
-            <ac:spMk id="3" creationId="{FC54803E-848B-CABB-316C-BF66325F9DF1}"/>
-          </ac:spMkLst>
-        </pc:spChg>
-        <pc:picChg chg="del mod">
-          <ac:chgData name="Miguel Trigueros Muñoz" userId="7753574ed83b4f98" providerId="LiveId" clId="{89D32F01-F4EF-46F7-9100-DAE74FAD5D28}" dt="2025-07-08T16:35:19.271" v="993" actId="478"/>
-          <ac:picMkLst>
-            <pc:docMk/>
-            <pc:sldMk cId="1962823157" sldId="351"/>
-            <ac:picMk id="5" creationId="{92ECFCBB-E4F7-5DA9-A347-8F48546DC6EB}"/>
-          </ac:picMkLst>
-        </pc:picChg>
-        <pc:picChg chg="add del mod modCrop">
-          <ac:chgData name="Miguel Trigueros Muñoz" userId="7753574ed83b4f98" providerId="LiveId" clId="{89D32F01-F4EF-46F7-9100-DAE74FAD5D28}" dt="2025-07-08T16:36:44.530" v="1001" actId="478"/>
-          <ac:picMkLst>
-            <pc:docMk/>
-            <pc:sldMk cId="1962823157" sldId="351"/>
-            <ac:picMk id="7" creationId="{0BCFDCF7-610B-DC90-B7A6-20381CA91CF3}"/>
-          </ac:picMkLst>
-        </pc:picChg>
-        <pc:picChg chg="add mod modCrop">
-          <ac:chgData name="Miguel Trigueros Muñoz" userId="7753574ed83b4f98" providerId="LiveId" clId="{89D32F01-F4EF-46F7-9100-DAE74FAD5D28}" dt="2025-07-08T16:37:02.665" v="1009" actId="1076"/>
-          <ac:picMkLst>
-            <pc:docMk/>
-            <pc:sldMk cId="1962823157" sldId="351"/>
-            <ac:picMk id="9" creationId="{78F524DD-91CD-B3B0-18CA-7DD1CE38762C}"/>
-          </ac:picMkLst>
-        </pc:picChg>
-      </pc:sldChg>
-      <pc:sldChg chg="delSp del">
-        <pc:chgData name="Miguel Trigueros Muñoz" userId="7753574ed83b4f98" providerId="LiveId" clId="{89D32F01-F4EF-46F7-9100-DAE74FAD5D28}" dt="2025-07-08T15:44:52.784" v="857" actId="2696"/>
-        <pc:sldMkLst>
-          <pc:docMk/>
-          <pc:sldMk cId="3809256849" sldId="352"/>
-        </pc:sldMkLst>
-        <pc:picChg chg="del">
-          <ac:chgData name="Miguel Trigueros Muñoz" userId="7753574ed83b4f98" providerId="LiveId" clId="{89D32F01-F4EF-46F7-9100-DAE74FAD5D28}" dt="2025-07-08T15:44:48.806" v="856" actId="478"/>
-          <ac:picMkLst>
-            <pc:docMk/>
-            <pc:sldMk cId="3809256849" sldId="352"/>
-            <ac:picMk id="1026" creationId="{665347D5-5306-D575-4EEA-0DE35140C3B3}"/>
-          </ac:picMkLst>
-        </pc:picChg>
-      </pc:sldChg>
-      <pc:sldChg chg="del">
-        <pc:chgData name="Miguel Trigueros Muñoz" userId="7753574ed83b4f98" providerId="LiveId" clId="{89D32F01-F4EF-46F7-9100-DAE74FAD5D28}" dt="2025-07-08T15:44:56.442" v="858" actId="2696"/>
-        <pc:sldMkLst>
-          <pc:docMk/>
-          <pc:sldMk cId="3325289584" sldId="353"/>
-        </pc:sldMkLst>
-      </pc:sldChg>
-      <pc:sldChg chg="modSp mod">
-        <pc:chgData name="Miguel Trigueros Muñoz" userId="7753574ed83b4f98" providerId="LiveId" clId="{89D32F01-F4EF-46F7-9100-DAE74FAD5D28}" dt="2025-07-08T15:42:34.593" v="850" actId="6549"/>
-        <pc:sldMkLst>
-          <pc:docMk/>
-          <pc:sldMk cId="2503801394" sldId="354"/>
-        </pc:sldMkLst>
-        <pc:spChg chg="mod">
-          <ac:chgData name="Miguel Trigueros Muñoz" userId="7753574ed83b4f98" providerId="LiveId" clId="{89D32F01-F4EF-46F7-9100-DAE74FAD5D28}" dt="2025-07-08T15:42:34.593" v="850" actId="6549"/>
-          <ac:spMkLst>
-            <pc:docMk/>
-            <pc:sldMk cId="2503801394" sldId="354"/>
-            <ac:spMk id="3" creationId="{B3284DEF-C7AB-674E-B8F2-E0234B1CA241}"/>
-          </ac:spMkLst>
-        </pc:spChg>
-        <pc:picChg chg="mod">
-          <ac:chgData name="Miguel Trigueros Muñoz" userId="7753574ed83b4f98" providerId="LiveId" clId="{89D32F01-F4EF-46F7-9100-DAE74FAD5D28}" dt="2025-07-08T15:42:28.021" v="849" actId="1076"/>
-          <ac:picMkLst>
-            <pc:docMk/>
-            <pc:sldMk cId="2503801394" sldId="354"/>
-            <ac:picMk id="3074" creationId="{630CEB0B-C961-C84F-B0BD-4371460C7DBE}"/>
-          </ac:picMkLst>
-        </pc:picChg>
-      </pc:sldChg>
-      <pc:sldChg chg="addSp delSp modSp mod">
-        <pc:chgData name="Miguel Trigueros Muñoz" userId="7753574ed83b4f98" providerId="LiveId" clId="{89D32F01-F4EF-46F7-9100-DAE74FAD5D28}" dt="2025-07-08T16:16:59.080" v="965" actId="1076"/>
-        <pc:sldMkLst>
-          <pc:docMk/>
-          <pc:sldMk cId="2618476077" sldId="355"/>
-        </pc:sldMkLst>
-        <pc:spChg chg="mod">
-          <ac:chgData name="Miguel Trigueros Muñoz" userId="7753574ed83b4f98" providerId="LiveId" clId="{89D32F01-F4EF-46F7-9100-DAE74FAD5D28}" dt="2025-07-08T15:44:39.555" v="852" actId="6549"/>
-          <ac:spMkLst>
-            <pc:docMk/>
-            <pc:sldMk cId="2618476077" sldId="355"/>
-            <ac:spMk id="3" creationId="{BCE9D3CB-8C9C-C893-332F-DDE223000B91}"/>
-          </ac:spMkLst>
-        </pc:spChg>
-        <pc:picChg chg="add mod">
-          <ac:chgData name="Miguel Trigueros Muñoz" userId="7753574ed83b4f98" providerId="LiveId" clId="{89D32F01-F4EF-46F7-9100-DAE74FAD5D28}" dt="2025-07-08T16:16:59.080" v="965" actId="1076"/>
-          <ac:picMkLst>
-            <pc:docMk/>
-            <pc:sldMk cId="2618476077" sldId="355"/>
-            <ac:picMk id="6" creationId="{BC48168D-19D3-0167-110A-D2C84DC4ECA0}"/>
-          </ac:picMkLst>
-        </pc:picChg>
-        <pc:picChg chg="del mod">
-          <ac:chgData name="Miguel Trigueros Muñoz" userId="7753574ed83b4f98" providerId="LiveId" clId="{89D32F01-F4EF-46F7-9100-DAE74FAD5D28}" dt="2025-07-08T16:16:48.255" v="958" actId="478"/>
-          <ac:picMkLst>
-            <pc:docMk/>
-            <pc:sldMk cId="2618476077" sldId="355"/>
-            <ac:picMk id="4098" creationId="{1C3AC2C8-FE98-F785-BAF8-5F99083EB9DC}"/>
-          </ac:picMkLst>
-        </pc:picChg>
-      </pc:sldChg>
-      <pc:sldChg chg="modSp mod">
-        <pc:chgData name="Miguel Trigueros Muñoz" userId="7753574ed83b4f98" providerId="LiveId" clId="{89D32F01-F4EF-46F7-9100-DAE74FAD5D28}" dt="2025-06-26T16:19:36.435" v="832" actId="313"/>
-        <pc:sldMkLst>
-          <pc:docMk/>
-          <pc:sldMk cId="557761139" sldId="362"/>
-        </pc:sldMkLst>
-        <pc:spChg chg="mod">
-          <ac:chgData name="Miguel Trigueros Muñoz" userId="7753574ed83b4f98" providerId="LiveId" clId="{89D32F01-F4EF-46F7-9100-DAE74FAD5D28}" dt="2025-06-26T16:19:36.435" v="832" actId="313"/>
-          <ac:spMkLst>
-            <pc:docMk/>
-            <pc:sldMk cId="557761139" sldId="362"/>
-            <ac:spMk id="2" creationId="{7AF05BDB-9640-3FA7-1745-A55A0494CB77}"/>
-          </ac:spMkLst>
-        </pc:spChg>
-      </pc:sldChg>
-      <pc:sldChg chg="modSp mod">
-        <pc:chgData name="Miguel Trigueros Muñoz" userId="7753574ed83b4f98" providerId="LiveId" clId="{89D32F01-F4EF-46F7-9100-DAE74FAD5D28}" dt="2025-07-08T15:41:32.714" v="847" actId="1076"/>
-        <pc:sldMkLst>
-          <pc:docMk/>
-          <pc:sldMk cId="941241975" sldId="364"/>
-        </pc:sldMkLst>
-        <pc:picChg chg="mod">
-          <ac:chgData name="Miguel Trigueros Muñoz" userId="7753574ed83b4f98" providerId="LiveId" clId="{89D32F01-F4EF-46F7-9100-DAE74FAD5D28}" dt="2025-07-08T15:41:27.015" v="846" actId="1076"/>
-          <ac:picMkLst>
-            <pc:docMk/>
-            <pc:sldMk cId="941241975" sldId="364"/>
-            <ac:picMk id="8" creationId="{3B44E0D2-D516-AB17-D083-F95DD910935E}"/>
-          </ac:picMkLst>
-        </pc:picChg>
-        <pc:picChg chg="mod">
-          <ac:chgData name="Miguel Trigueros Muñoz" userId="7753574ed83b4f98" providerId="LiveId" clId="{89D32F01-F4EF-46F7-9100-DAE74FAD5D28}" dt="2025-07-08T15:41:32.714" v="847" actId="1076"/>
-          <ac:picMkLst>
-            <pc:docMk/>
-            <pc:sldMk cId="941241975" sldId="364"/>
-            <ac:picMk id="11" creationId="{59D4B801-FD3B-F2BF-59B5-E031CDB3E3BC}"/>
-          </ac:picMkLst>
-        </pc:picChg>
-      </pc:sldChg>
-      <pc:sldChg chg="modSp mod">
-        <pc:chgData name="Miguel Trigueros Muñoz" userId="7753574ed83b4f98" providerId="LiveId" clId="{89D32F01-F4EF-46F7-9100-DAE74FAD5D28}" dt="2025-06-26T16:19:39.588" v="836" actId="313"/>
-        <pc:sldMkLst>
-          <pc:docMk/>
-          <pc:sldMk cId="3422367261" sldId="365"/>
-        </pc:sldMkLst>
-        <pc:spChg chg="mod">
-          <ac:chgData name="Miguel Trigueros Muñoz" userId="7753574ed83b4f98" providerId="LiveId" clId="{89D32F01-F4EF-46F7-9100-DAE74FAD5D28}" dt="2025-06-26T16:19:39.588" v="836" actId="313"/>
-          <ac:spMkLst>
-            <pc:docMk/>
-            <pc:sldMk cId="3422367261" sldId="365"/>
-            <ac:spMk id="2" creationId="{0F95D9BF-2CF4-CACF-7AEE-2257411BFAA5}"/>
-          </ac:spMkLst>
-        </pc:spChg>
-      </pc:sldChg>
-      <pc:sldChg chg="modSp mod">
-        <pc:chgData name="Miguel Trigueros Muñoz" userId="7753574ed83b4f98" providerId="LiveId" clId="{89D32F01-F4EF-46F7-9100-DAE74FAD5D28}" dt="2025-06-26T16:19:37.969" v="834" actId="313"/>
-        <pc:sldMkLst>
-          <pc:docMk/>
-          <pc:sldMk cId="1115552724" sldId="366"/>
-        </pc:sldMkLst>
-        <pc:spChg chg="mod">
-          <ac:chgData name="Miguel Trigueros Muñoz" userId="7753574ed83b4f98" providerId="LiveId" clId="{89D32F01-F4EF-46F7-9100-DAE74FAD5D28}" dt="2025-06-26T16:19:37.969" v="834" actId="313"/>
-          <ac:spMkLst>
-            <pc:docMk/>
-            <pc:sldMk cId="1115552724" sldId="366"/>
-            <ac:spMk id="2" creationId="{57F59E39-D913-6AA3-D797-1985C1E6E793}"/>
-          </ac:spMkLst>
-        </pc:spChg>
-      </pc:sldChg>
-      <pc:sldChg chg="addSp delSp modSp add mod modClrScheme chgLayout modNotesTx">
-        <pc:chgData name="Miguel Trigueros Muñoz" userId="7753574ed83b4f98" providerId="LiveId" clId="{89D32F01-F4EF-46F7-9100-DAE74FAD5D28}" dt="2025-07-08T16:50:25.530" v="1016" actId="14100"/>
+      <pc:sldChg chg="modSp">
+        <pc:chgData name="MIGUEL TRIGUEROS MUÑOZ" userId="S::miguel.trigueros@aulaxxi.murciaeduca.es::a4ee0321-97d7-430f-98a8-7ed13ff9a4bf" providerId="AD" clId="Web-{64D2F8E1-2E23-A18C-16A4-DF1CAE15C94F}" dt="2026-02-02T09:19:35.767" v="42" actId="20577"/>
         <pc:sldMkLst>
           <pc:docMk/>
           <pc:sldMk cId="692600546" sldId="367"/>
         </pc:sldMkLst>
-        <pc:spChg chg="mod ord">
-          <ac:chgData name="Miguel Trigueros Muñoz" userId="7753574ed83b4f98" providerId="LiveId" clId="{89D32F01-F4EF-46F7-9100-DAE74FAD5D28}" dt="2025-06-26T16:19:33.417" v="827" actId="313"/>
+        <pc:spChg chg="mod">
+          <ac:chgData name="MIGUEL TRIGUEROS MUÑOZ" userId="S::miguel.trigueros@aulaxxi.murciaeduca.es::a4ee0321-97d7-430f-98a8-7ed13ff9a4bf" providerId="AD" clId="Web-{64D2F8E1-2E23-A18C-16A4-DF1CAE15C94F}" dt="2026-02-02T09:19:16.955" v="23" actId="20577"/>
           <ac:spMkLst>
             <pc:docMk/>
             <pc:sldMk cId="692600546" sldId="367"/>
             <ac:spMk id="2" creationId="{A470792D-9AB3-0D96-3133-F32280B9759B}"/>
           </ac:spMkLst>
         </pc:spChg>
-        <pc:spChg chg="mod ord">
-          <ac:chgData name="Miguel Trigueros Muñoz" userId="7753574ed83b4f98" providerId="LiveId" clId="{89D32F01-F4EF-46F7-9100-DAE74FAD5D28}" dt="2025-06-26T16:14:49.404" v="634" actId="700"/>
-          <ac:spMkLst>
-            <pc:docMk/>
-            <pc:sldMk cId="692600546" sldId="367"/>
-            <ac:spMk id="4" creationId="{45F1485F-C814-3E28-1E63-4515F2490BF6}"/>
-          </ac:spMkLst>
-        </pc:spChg>
-        <pc:spChg chg="add mod">
-          <ac:chgData name="Miguel Trigueros Muñoz" userId="7753574ed83b4f98" providerId="LiveId" clId="{89D32F01-F4EF-46F7-9100-DAE74FAD5D28}" dt="2025-07-08T16:50:25.530" v="1016" actId="14100"/>
+        <pc:spChg chg="mod">
+          <ac:chgData name="MIGUEL TRIGUEROS MUÑOZ" userId="S::miguel.trigueros@aulaxxi.murciaeduca.es::a4ee0321-97d7-430f-98a8-7ed13ff9a4bf" providerId="AD" clId="Web-{64D2F8E1-2E23-A18C-16A4-DF1CAE15C94F}" dt="2026-02-02T09:19:35.767" v="42" actId="20577"/>
           <ac:spMkLst>
             <pc:docMk/>
             <pc:sldMk cId="692600546" sldId="367"/>
             <ac:spMk id="9" creationId="{6E43A624-A297-B505-0E9E-A974120BB173}"/>
           </ac:spMkLst>
         </pc:spChg>
-      </pc:sldChg>
-      <pc:sldChg chg="modSp add mod modNotesTx">
-        <pc:chgData name="Miguel Trigueros Muñoz" userId="7753574ed83b4f98" providerId="LiveId" clId="{89D32F01-F4EF-46F7-9100-DAE74FAD5D28}" dt="2025-07-08T16:10:46.472" v="953" actId="20577"/>
-        <pc:sldMkLst>
-          <pc:docMk/>
-          <pc:sldMk cId="3099558668" sldId="368"/>
-        </pc:sldMkLst>
-        <pc:spChg chg="mod">
-          <ac:chgData name="Miguel Trigueros Muñoz" userId="7753574ed83b4f98" providerId="LiveId" clId="{89D32F01-F4EF-46F7-9100-DAE74FAD5D28}" dt="2025-06-26T16:19:37.311" v="833" actId="313"/>
-          <ac:spMkLst>
-            <pc:docMk/>
-            <pc:sldMk cId="3099558668" sldId="368"/>
-            <ac:spMk id="2" creationId="{BB537EC2-557B-28C1-B9F0-D130A133E8B3}"/>
-          </ac:spMkLst>
-        </pc:spChg>
-        <pc:spChg chg="mod">
-          <ac:chgData name="Miguel Trigueros Muñoz" userId="7753574ed83b4f98" providerId="LiveId" clId="{89D32F01-F4EF-46F7-9100-DAE74FAD5D28}" dt="2025-07-08T16:10:46.472" v="953" actId="20577"/>
-          <ac:spMkLst>
-            <pc:docMk/>
-            <pc:sldMk cId="3099558668" sldId="368"/>
-            <ac:spMk id="9" creationId="{8B008C99-BD9D-DA57-86F0-312B64509D53}"/>
-          </ac:spMkLst>
-        </pc:spChg>
-      </pc:sldChg>
-      <pc:sldChg chg="modSp add mod modNotesTx">
-        <pc:chgData name="Miguel Trigueros Muñoz" userId="7753574ed83b4f98" providerId="LiveId" clId="{89D32F01-F4EF-46F7-9100-DAE74FAD5D28}" dt="2025-07-08T16:51:19.533" v="1050" actId="20577"/>
-        <pc:sldMkLst>
-          <pc:docMk/>
-          <pc:sldMk cId="251016839" sldId="369"/>
-        </pc:sldMkLst>
-        <pc:spChg chg="mod">
-          <ac:chgData name="Miguel Trigueros Muñoz" userId="7753574ed83b4f98" providerId="LiveId" clId="{89D32F01-F4EF-46F7-9100-DAE74FAD5D28}" dt="2025-06-26T16:19:40.515" v="837" actId="313"/>
-          <ac:spMkLst>
-            <pc:docMk/>
-            <pc:sldMk cId="251016839" sldId="369"/>
-            <ac:spMk id="2" creationId="{93F1F961-4539-ACB7-6CAB-37F1362A19EE}"/>
-          </ac:spMkLst>
-        </pc:spChg>
-        <pc:spChg chg="mod">
-          <ac:chgData name="Miguel Trigueros Muñoz" userId="7753574ed83b4f98" providerId="LiveId" clId="{89D32F01-F4EF-46F7-9100-DAE74FAD5D28}" dt="2025-07-08T16:51:19.533" v="1050" actId="20577"/>
-          <ac:spMkLst>
-            <pc:docMk/>
-            <pc:sldMk cId="251016839" sldId="369"/>
-            <ac:spMk id="9" creationId="{9558548F-108C-0879-016E-2C6F9565BEF8}"/>
-          </ac:spMkLst>
-        </pc:spChg>
-      </pc:sldChg>
-    </pc:docChg>
-  </pc:docChgLst>
-  <pc:docChgLst>
-    <pc:chgData name="MIGUEL TRIGUEROS MUÑOZ" userId="a4ee0321-97d7-430f-98a8-7ed13ff9a4bf" providerId="ADAL" clId="{79DF4C0E-7ECC-44F1-BA58-C10C01064493}"/>
-    <pc:docChg chg="undo custSel addSld delSld modSld modMainMaster modSection">
-      <pc:chgData name="MIGUEL TRIGUEROS MUÑOZ" userId="a4ee0321-97d7-430f-98a8-7ed13ff9a4bf" providerId="ADAL" clId="{79DF4C0E-7ECC-44F1-BA58-C10C01064493}" dt="2025-03-03T12:26:44.312" v="589" actId="20577"/>
-      <pc:docMkLst>
-        <pc:docMk/>
-      </pc:docMkLst>
-      <pc:sldChg chg="modSp mod">
-        <pc:chgData name="MIGUEL TRIGUEROS MUÑOZ" userId="a4ee0321-97d7-430f-98a8-7ed13ff9a4bf" providerId="ADAL" clId="{79DF4C0E-7ECC-44F1-BA58-C10C01064493}" dt="2025-02-06T19:19:29.793" v="11" actId="20577"/>
-        <pc:sldMkLst>
-          <pc:docMk/>
-          <pc:sldMk cId="308865771" sldId="256"/>
-        </pc:sldMkLst>
-      </pc:sldChg>
-      <pc:sldChg chg="modSp mod">
-        <pc:chgData name="MIGUEL TRIGUEROS MUÑOZ" userId="a4ee0321-97d7-430f-98a8-7ed13ff9a4bf" providerId="ADAL" clId="{79DF4C0E-7ECC-44F1-BA58-C10C01064493}" dt="2025-02-07T16:25:43.129" v="414" actId="3626"/>
-        <pc:sldMkLst>
-          <pc:docMk/>
-          <pc:sldMk cId="1662085430" sldId="302"/>
-        </pc:sldMkLst>
-      </pc:sldChg>
-      <pc:sldChg chg="addSp delSp modSp mod">
-        <pc:chgData name="MIGUEL TRIGUEROS MUÑOZ" userId="a4ee0321-97d7-430f-98a8-7ed13ff9a4bf" providerId="ADAL" clId="{79DF4C0E-7ECC-44F1-BA58-C10C01064493}" dt="2025-02-07T18:30:37.161" v="558" actId="20577"/>
-        <pc:sldMkLst>
-          <pc:docMk/>
-          <pc:sldMk cId="745458148" sldId="314"/>
-        </pc:sldMkLst>
-      </pc:sldChg>
-      <pc:sldChg chg="delSp modSp mod delAnim modNotesTx">
-        <pc:chgData name="MIGUEL TRIGUEROS MUÑOZ" userId="a4ee0321-97d7-430f-98a8-7ed13ff9a4bf" providerId="ADAL" clId="{79DF4C0E-7ECC-44F1-BA58-C10C01064493}" dt="2025-02-17T20:28:27.487" v="567" actId="478"/>
-        <pc:sldMkLst>
-          <pc:docMk/>
-          <pc:sldMk cId="2044085444" sldId="327"/>
-        </pc:sldMkLst>
-      </pc:sldChg>
-      <pc:sldChg chg="modSp mod">
-        <pc:chgData name="MIGUEL TRIGUEROS MUÑOZ" userId="a4ee0321-97d7-430f-98a8-7ed13ff9a4bf" providerId="ADAL" clId="{79DF4C0E-7ECC-44F1-BA58-C10C01064493}" dt="2025-03-03T12:26:44.312" v="589" actId="20577"/>
-        <pc:sldMkLst>
-          <pc:docMk/>
-          <pc:sldMk cId="155112023" sldId="328"/>
-        </pc:sldMkLst>
-      </pc:sldChg>
-      <pc:sldChg chg="delSp modSp modAnim">
-        <pc:chgData name="MIGUEL TRIGUEROS MUÑOZ" userId="a4ee0321-97d7-430f-98a8-7ed13ff9a4bf" providerId="ADAL" clId="{79DF4C0E-7ECC-44F1-BA58-C10C01064493}" dt="2025-02-07T18:34:28.648" v="566" actId="478"/>
-        <pc:sldMkLst>
-          <pc:docMk/>
-          <pc:sldMk cId="952270227" sldId="333"/>
-        </pc:sldMkLst>
-      </pc:sldChg>
-      <pc:sldChg chg="modSp mod">
-        <pc:chgData name="MIGUEL TRIGUEROS MUÑOZ" userId="a4ee0321-97d7-430f-98a8-7ed13ff9a4bf" providerId="ADAL" clId="{79DF4C0E-7ECC-44F1-BA58-C10C01064493}" dt="2025-02-07T15:51:08.976" v="294" actId="115"/>
-        <pc:sldMkLst>
-          <pc:docMk/>
-          <pc:sldMk cId="2896794478" sldId="348"/>
-        </pc:sldMkLst>
-      </pc:sldChg>
-      <pc:sldChg chg="modSp">
-        <pc:chgData name="MIGUEL TRIGUEROS MUÑOZ" userId="a4ee0321-97d7-430f-98a8-7ed13ff9a4bf" providerId="ADAL" clId="{79DF4C0E-7ECC-44F1-BA58-C10C01064493}" dt="2025-02-07T18:34:06.632" v="561" actId="14100"/>
-        <pc:sldMkLst>
-          <pc:docMk/>
-          <pc:sldMk cId="557761139" sldId="362"/>
-        </pc:sldMkLst>
-      </pc:sldChg>
-      <pc:sldChg chg="modSp mod">
-        <pc:chgData name="MIGUEL TRIGUEROS MUÑOZ" userId="a4ee0321-97d7-430f-98a8-7ed13ff9a4bf" providerId="ADAL" clId="{79DF4C0E-7ECC-44F1-BA58-C10C01064493}" dt="2025-02-07T15:51:42.685" v="356" actId="20577"/>
-        <pc:sldMkLst>
-          <pc:docMk/>
-          <pc:sldMk cId="3422367261" sldId="365"/>
-        </pc:sldMkLst>
-      </pc:sldChg>
-      <pc:sldChg chg="modSp mod">
-        <pc:chgData name="MIGUEL TRIGUEROS MUÑOZ" userId="a4ee0321-97d7-430f-98a8-7ed13ff9a4bf" providerId="ADAL" clId="{79DF4C0E-7ECC-44F1-BA58-C10C01064493}" dt="2025-02-07T15:48:41.446" v="277" actId="113"/>
-        <pc:sldMkLst>
-          <pc:docMk/>
-          <pc:sldMk cId="1115552724" sldId="366"/>
-        </pc:sldMkLst>
-      </pc:sldChg>
-      <pc:sldChg chg="modSp add del">
-        <pc:chgData name="MIGUEL TRIGUEROS MUÑOZ" userId="a4ee0321-97d7-430f-98a8-7ed13ff9a4bf" providerId="ADAL" clId="{79DF4C0E-7ECC-44F1-BA58-C10C01064493}" dt="2025-02-07T18:27:11.879" v="419" actId="2696"/>
-        <pc:sldMkLst>
-          <pc:docMk/>
-          <pc:sldMk cId="359063030" sldId="367"/>
-        </pc:sldMkLst>
-      </pc:sldChg>
-      <pc:sldChg chg="modSp add del">
-        <pc:chgData name="MIGUEL TRIGUEROS MUÑOZ" userId="a4ee0321-97d7-430f-98a8-7ed13ff9a4bf" providerId="ADAL" clId="{79DF4C0E-7ECC-44F1-BA58-C10C01064493}" dt="2025-02-07T18:28:37.827" v="435" actId="2696"/>
-        <pc:sldMkLst>
-          <pc:docMk/>
-          <pc:sldMk cId="3827793099" sldId="367"/>
-        </pc:sldMkLst>
-      </pc:sldChg>
-      <pc:sldMasterChg chg="modSp mod">
-        <pc:chgData name="MIGUEL TRIGUEROS MUÑOZ" userId="a4ee0321-97d7-430f-98a8-7ed13ff9a4bf" providerId="ADAL" clId="{79DF4C0E-7ECC-44F1-BA58-C10C01064493}" dt="2025-02-06T19:25:52.832" v="34" actId="20577"/>
-        <pc:sldMasterMkLst>
-          <pc:docMk/>
-          <pc:sldMasterMk cId="48007759" sldId="2147483686"/>
-        </pc:sldMasterMkLst>
-      </pc:sldMasterChg>
-    </pc:docChg>
-  </pc:docChgLst>
-  <pc:docChgLst>
-    <pc:chgData name="MIGUEL TRIGUEROS MUÑOZ" userId="S::miguel.trigueros@aulaxxi.murciaeduca.es::a4ee0321-97d7-430f-98a8-7ed13ff9a4bf" providerId="AD" clId="Web-{108783FA-C518-7373-97B0-8E7EFF86861E}"/>
-    <pc:docChg chg="sldOrd">
-      <pc:chgData name="MIGUEL TRIGUEROS MUÑOZ" userId="S::miguel.trigueros@aulaxxi.murciaeduca.es::a4ee0321-97d7-430f-98a8-7ed13ff9a4bf" providerId="AD" clId="Web-{108783FA-C518-7373-97B0-8E7EFF86861E}" dt="2025-02-13T10:37:02.945" v="0"/>
-      <pc:docMkLst>
-        <pc:docMk/>
-      </pc:docMkLst>
-      <pc:sldChg chg="ord">
-        <pc:chgData name="MIGUEL TRIGUEROS MUÑOZ" userId="S::miguel.trigueros@aulaxxi.murciaeduca.es::a4ee0321-97d7-430f-98a8-7ed13ff9a4bf" providerId="AD" clId="Web-{108783FA-C518-7373-97B0-8E7EFF86861E}" dt="2025-02-13T10:37:02.945" v="0"/>
-        <pc:sldMkLst>
-          <pc:docMk/>
-          <pc:sldMk cId="941241975" sldId="364"/>
-        </pc:sldMkLst>
-      </pc:sldChg>
-    </pc:docChg>
-  </pc:docChgLst>
-  <pc:docChgLst>
-    <pc:chgData name="MIGUEL TRIGUEROS MUÑOZ" userId="S::miguel.trigueros@aulaxxi.murciaeduca.es::a4ee0321-97d7-430f-98a8-7ed13ff9a4bf" providerId="AD" clId="Web-{A96DD97C-90FA-8B42-AE93-F4D366C5FDA8}"/>
-    <pc:docChg chg="modSld sldOrd">
-      <pc:chgData name="MIGUEL TRIGUEROS MUÑOZ" userId="S::miguel.trigueros@aulaxxi.murciaeduca.es::a4ee0321-97d7-430f-98a8-7ed13ff9a4bf" providerId="AD" clId="Web-{A96DD97C-90FA-8B42-AE93-F4D366C5FDA8}" dt="2024-02-12T07:07:13.113" v="1"/>
-      <pc:docMkLst>
-        <pc:docMk/>
-      </pc:docMkLst>
-      <pc:sldChg chg="ord">
-        <pc:chgData name="MIGUEL TRIGUEROS MUÑOZ" userId="S::miguel.trigueros@aulaxxi.murciaeduca.es::a4ee0321-97d7-430f-98a8-7ed13ff9a4bf" providerId="AD" clId="Web-{A96DD97C-90FA-8B42-AE93-F4D366C5FDA8}" dt="2024-02-12T07:07:13.113" v="1"/>
-        <pc:sldMkLst>
-          <pc:docMk/>
-          <pc:sldMk cId="3289438449" sldId="318"/>
-        </pc:sldMkLst>
-      </pc:sldChg>
-      <pc:sldChg chg="modSp">
-        <pc:chgData name="MIGUEL TRIGUEROS MUÑOZ" userId="S::miguel.trigueros@aulaxxi.murciaeduca.es::a4ee0321-97d7-430f-98a8-7ed13ff9a4bf" providerId="AD" clId="Web-{A96DD97C-90FA-8B42-AE93-F4D366C5FDA8}" dt="2024-02-12T07:01:05.885" v="0" actId="1076"/>
-        <pc:sldMkLst>
-          <pc:docMk/>
-          <pc:sldMk cId="1059083778" sldId="319"/>
-        </pc:sldMkLst>
       </pc:sldChg>
     </pc:docChg>
   </pc:docChgLst>
@@ -1625,7 +409,7 @@
           <a:p>
             <a:fld id="{BA89FAE3-5837-4C1B-BC4B-90063F16532C}" type="datetimeFigureOut">
               <a:rPr lang="es-ES" smtClean="0"/>
-              <a:t>08/07/2025</a:t>
+              <a:t>15/02/2026</a:t>
             </a:fld>
             <a:endParaRPr lang="es-ES"/>
           </a:p>
@@ -1802,7 +586,7 @@
           <a:p>
             <a:fld id="{73C425FF-1B7F-4E8F-BB9C-39A442C619BF}" type="datetimeFigureOut">
               <a:rPr lang="es-ES" smtClean="0"/>
-              <a:t>08/07/2025</a:t>
+              <a:t>15/02/2026</a:t>
             </a:fld>
             <a:endParaRPr lang="es-ES"/>
           </a:p>
@@ -2911,26 +1695,36 @@
           <a:bodyPr/>
           <a:lstStyle/>
           <a:p>
-            <a:pPr marL="0" marR="0" lvl="0" indent="0" algn="l" defTabSz="914400" rtl="0" eaLnBrk="1" fontAlgn="auto" latinLnBrk="0" hangingPunct="1">
-              <a:lnSpc>
-                <a:spcPct val="100000"/>
-              </a:lnSpc>
-              <a:spcBef>
-                <a:spcPts val="0"/>
-              </a:spcBef>
-              <a:spcAft>
-                <a:spcPts val="0"/>
-              </a:spcAft>
-              <a:buClrTx/>
-              <a:buSzTx/>
-              <a:buFontTx/>
-              <a:buNone/>
-              <a:tabLst/>
+            <a:pPr>
               <a:defRPr/>
             </a:pPr>
             <a:r>
               <a:rPr lang="es-ES" dirty="0"/>
-              <a:t>¿Qué implica en el código una Agregación?</a:t>
+              <a:t>¿Qué implica en el código una Agregación? En la </a:t>
+            </a:r>
+            <a:r>
+              <a:rPr lang="es-ES" dirty="0" err="1"/>
+              <a:t>diapsitiva</a:t>
+            </a:r>
+            <a:r>
+              <a:rPr lang="es-ES" dirty="0"/>
+              <a:t> se muestra el código creando las instancias en el </a:t>
+            </a:r>
+            <a:r>
+              <a:rPr lang="es-ES" dirty="0" err="1"/>
+              <a:t>Main</a:t>
+            </a:r>
+            <a:r>
+              <a:rPr lang="es-ES" dirty="0"/>
+              <a:t>, es interesante ver cómo afectan las relaciones de agregación y composición a los Constructores() o a métodos del tipo </a:t>
+            </a:r>
+            <a:r>
+              <a:rPr lang="es-ES" dirty="0" err="1"/>
+              <a:t>añadirBarco</a:t>
+            </a:r>
+            <a:r>
+              <a:rPr lang="es-ES" dirty="0"/>
+              <a:t>()...</a:t>
             </a:r>
           </a:p>
           <a:p>
@@ -4879,7 +3673,7 @@
           <a:p>
             <a:fld id="{ACB1A6C2-4497-4021-B992-BC7E2DD17ECA}" type="datetime1">
               <a:rPr lang="en-US" smtClean="0"/>
-              <a:t>7/8/2025</a:t>
+              <a:t>2/15/2026</a:t>
             </a:fld>
             <a:endParaRPr lang="en-US"/>
           </a:p>
@@ -6134,7 +4928,7 @@
           <a:p>
             <a:fld id="{F3DA8F42-B3BB-41A1-AB4E-8617CD9BC174}" type="datetime1">
               <a:rPr lang="en-US" smtClean="0"/>
-              <a:t>7/8/2025</a:t>
+              <a:t>2/15/2026</a:t>
             </a:fld>
             <a:endParaRPr lang="en-US"/>
           </a:p>
@@ -6529,7 +5323,7 @@
           <a:p>
             <a:fld id="{EC685CC9-6004-4391-A195-A2D4DFB5034A}" type="datetime1">
               <a:rPr lang="en-US" smtClean="0"/>
-              <a:t>7/8/2025</a:t>
+              <a:t>2/15/2026</a:t>
             </a:fld>
             <a:endParaRPr lang="en-US"/>
           </a:p>
@@ -6707,7 +5501,7 @@
           <a:p>
             <a:fld id="{D9542DED-1971-464D-AC83-85410DCF904F}" type="datetime1">
               <a:rPr lang="en-US" smtClean="0"/>
-              <a:t>7/8/2025</a:t>
+              <a:t>2/15/2026</a:t>
             </a:fld>
             <a:endParaRPr lang="en-US"/>
           </a:p>
@@ -6875,7 +5669,7 @@
           <a:p>
             <a:fld id="{7D441FF4-63D7-4E0C-B192-FD104AB33BF2}" type="datetime1">
               <a:rPr lang="en-US" smtClean="0"/>
-              <a:t>7/8/2025</a:t>
+              <a:t>2/15/2026</a:t>
             </a:fld>
             <a:endParaRPr lang="en-US"/>
           </a:p>
@@ -9726,7 +8520,7 @@
           <a:p>
             <a:r>
               <a:rPr lang="es-ES" dirty="0"/>
-              <a:t>3. TAREA ED5b0801</a:t>
+              <a:t>3. TAREA ED5b0800</a:t>
             </a:r>
           </a:p>
         </p:txBody>
@@ -9754,7 +8548,7 @@
           </a:xfrm>
         </p:spPr>
         <p:txBody>
-          <a:bodyPr>
+          <a:bodyPr vert="horz" lIns="91440" tIns="45720" rIns="91440" bIns="45720" rtlCol="0" anchor="t">
             <a:normAutofit/>
           </a:bodyPr>
           <a:lstStyle/>
@@ -9767,13 +8561,13 @@
           <a:p>
             <a:r>
               <a:rPr lang="es-ES" dirty="0"/>
-              <a:t>Herramientas para realizar diagramas UML</a:t>
+              <a:t>Investiga Herramientas para realizar diagramas UML</a:t>
             </a:r>
           </a:p>
           <a:p>
             <a:r>
               <a:rPr lang="es-ES" dirty="0"/>
-              <a:t>Realiza un videotutorial</a:t>
+              <a:t>Crea un videotutorial con OBS</a:t>
             </a:r>
           </a:p>
         </p:txBody>
@@ -10019,7 +8813,7 @@
         </p:blipFill>
         <p:spPr>
           <a:xfrm>
-            <a:off x="380783" y="4352924"/>
+            <a:off x="452864" y="4404410"/>
             <a:ext cx="4572000" cy="1703789"/>
           </a:xfrm>
           <a:prstGeom prst="rect">
@@ -10143,7 +8937,7 @@
         </p:nvSpPr>
         <p:spPr/>
         <p:txBody>
-          <a:bodyPr numCol="1">
+          <a:bodyPr vert="horz" lIns="91440" tIns="45720" rIns="91440" bIns="45720" numCol="1" rtlCol="0" anchor="t">
             <a:normAutofit/>
           </a:bodyPr>
           <a:lstStyle/>
@@ -10224,6 +9018,37 @@
               <a:rPr lang="es-ES"/>
               <a:t>El todo puede dejar de tener una de las partes</a:t>
             </a:r>
+          </a:p>
+          <a:p>
+            <a:pPr lvl="2"/>
+            <a:endParaRPr lang="es-ES" dirty="0"/>
+          </a:p>
+          <a:p>
+            <a:pPr lvl="2"/>
+            <a:r>
+              <a:rPr lang="es-ES" dirty="0"/>
+              <a:t>Pensemos el código con constructores, en lugar del </a:t>
+            </a:r>
+            <a:r>
+              <a:rPr lang="es-ES" dirty="0" err="1"/>
+              <a:t>Main</a:t>
+            </a:r>
+          </a:p>
+          <a:p>
+            <a:pPr lvl="3"/>
+            <a:r>
+              <a:rPr lang="es-ES">
+                <a:solidFill>
+                  <a:srgbClr val="54A021"/>
+                </a:solidFill>
+              </a:rPr>
+              <a:t>(ver notas)</a:t>
+            </a:r>
+            <a:endParaRPr lang="es-ES" dirty="0">
+              <a:solidFill>
+                <a:srgbClr val="54A021"/>
+              </a:solidFill>
+            </a:endParaRPr>
           </a:p>
         </p:txBody>
       </p:sp>
@@ -10309,7 +9134,7 @@
         </p:blipFill>
         <p:spPr>
           <a:xfrm>
-            <a:off x="5833322" y="1209448"/>
+            <a:off x="5924242" y="1209448"/>
             <a:ext cx="2701079" cy="3873347"/>
           </a:xfrm>
           <a:prstGeom prst="rect">
@@ -12263,7 +11088,9 @@
         </p:nvSpPr>
         <p:spPr/>
         <p:txBody>
-          <a:bodyPr/>
+          <a:bodyPr vert="horz" lIns="91440" tIns="45720" rIns="91440" bIns="45720" rtlCol="0" anchor="t">
+            <a:normAutofit/>
+          </a:bodyPr>
           <a:lstStyle/>
           <a:p>
             <a:r>
@@ -12318,24 +11145,14 @@
             </a:r>
           </a:p>
           <a:p>
-            <a:r>
-              <a:rPr lang="es-ES" dirty="0"/>
-              <a:t>Vídeos</a:t>
-            </a:r>
-          </a:p>
-          <a:p>
-            <a:pPr lvl="1"/>
-            <a:r>
-              <a:rPr lang="es-ES" dirty="0"/>
-              <a:t>UML Lucid </a:t>
-            </a:r>
-            <a:r>
-              <a:rPr lang="es-ES" dirty="0">
-                <a:hlinkClick r:id="rId5"/>
-              </a:rPr>
-              <a:t>Software</a:t>
-            </a:r>
-            <a:endParaRPr lang="es-ES" dirty="0"/>
+            <a:pPr marL="0" indent="0">
+              <a:buNone/>
+            </a:pPr>
+            <a:endParaRPr lang="es-ES" dirty="0">
+              <a:solidFill>
+                <a:srgbClr val="404040"/>
+              </a:solidFill>
+            </a:endParaRPr>
           </a:p>
           <a:p>
             <a:endParaRPr lang="es-ES" dirty="0"/>
